--- a/reports/Presentation.pptx
+++ b/reports/Presentation.pptx
@@ -5,20 +5,20 @@
     <p:sldMasterId id="2147483648" r:id="rId1"/>
   </p:sldMasterIdLst>
   <p:sldIdLst>
-    <p:sldId id="256" r:id="rId7"/>
-    <p:sldId id="257" r:id="rId8"/>
-    <p:sldId id="258" r:id="rId9"/>
-    <p:sldId id="259" r:id="rId10"/>
-    <p:sldId id="260" r:id="rId11"/>
-    <p:sldId id="261" r:id="rId12"/>
-    <p:sldId id="262" r:id="rId13"/>
-    <p:sldId id="263" r:id="rId14"/>
-    <p:sldId id="264" r:id="rId15"/>
-    <p:sldId id="265" r:id="rId16"/>
-    <p:sldId id="266" r:id="rId17"/>
-    <p:sldId id="267" r:id="rId18"/>
+    <p:sldId id="256" r:id="rId2"/>
+    <p:sldId id="257" r:id="rId3"/>
+    <p:sldId id="258" r:id="rId4"/>
+    <p:sldId id="259" r:id="rId5"/>
+    <p:sldId id="260" r:id="rId6"/>
+    <p:sldId id="261" r:id="rId7"/>
+    <p:sldId id="262" r:id="rId8"/>
+    <p:sldId id="263" r:id="rId9"/>
+    <p:sldId id="264" r:id="rId10"/>
+    <p:sldId id="265" r:id="rId11"/>
+    <p:sldId id="266" r:id="rId12"/>
+    <p:sldId id="267" r:id="rId13"/>
   </p:sldIdLst>
-  <p:sldSz cx="12188952" cy="6858000" type="screen4x3"/>
+  <p:sldSz cx="12188825" cy="6858000"/>
   <p:notesSz cx="6858000" cy="9144000"/>
   <p:defaultTextStyle>
     <a:defPPr>
@@ -115,6 +115,22 @@
       </a:defRPr>
     </a:lvl9pPr>
   </p:defaultTextStyle>
+  <p:extLst>
+    <p:ext uri="{EFAFB233-063F-42B5-8137-9DF3F51BA10A}">
+      <p15:sldGuideLst xmlns:p15="http://schemas.microsoft.com/office/powerpoint/2012/main">
+        <p15:guide id="1" orient="horz" pos="2160">
+          <p15:clr>
+            <a:srgbClr val="A4A3A4"/>
+          </p15:clr>
+        </p15:guide>
+        <p15:guide id="2" pos="2880">
+          <p15:clr>
+            <a:srgbClr val="A4A3A4"/>
+          </p15:clr>
+        </p15:guide>
+      </p15:sldGuideLst>
+    </p:ext>
+  </p:extLst>
 </p:presentation>
 </file>
 
@@ -156,10 +172,9 @@
           <a:lstStyle/>
           <a:p>
             <a:r>
-              <a:rPr lang="en-US" smtClean="0"/>
+              <a:rPr lang="en-US"/>
               <a:t>Click to edit Master title style</a:t>
             </a:r>
-            <a:endParaRPr lang="en-US"/>
           </a:p>
         </p:txBody>
       </p:sp>
@@ -275,10 +290,9 @@
           </a:lstStyle>
           <a:p>
             <a:r>
-              <a:rPr lang="en-US" smtClean="0"/>
+              <a:rPr lang="en-US"/>
               <a:t>Click to edit Master subtitle style</a:t>
             </a:r>
-            <a:endParaRPr lang="en-US"/>
           </a:p>
         </p:txBody>
       </p:sp>
@@ -299,7 +313,7 @@
           <a:p>
             <a:fld id="{5BCAD085-E8A6-8845-BD4E-CB4CCA059FC4}" type="datetimeFigureOut">
               <a:rPr lang="en-US" smtClean="0"/>
-              <a:t>1/27/13</a:t>
+              <a:t>6/13/2026</a:t>
             </a:fld>
             <a:endParaRPr lang="en-US"/>
           </a:p>
@@ -393,10 +407,9 @@
           <a:lstStyle/>
           <a:p>
             <a:r>
-              <a:rPr lang="en-US" smtClean="0"/>
+              <a:rPr lang="en-US"/>
               <a:t>Click to edit Master title style</a:t>
             </a:r>
-            <a:endParaRPr lang="en-US"/>
           </a:p>
         </p:txBody>
       </p:sp>
@@ -417,38 +430,37 @@
           <a:p>
             <a:pPr lvl="0"/>
             <a:r>
-              <a:rPr lang="en-US" smtClean="0"/>
+              <a:rPr lang="en-US"/>
               <a:t>Click to edit Master text styles</a:t>
             </a:r>
           </a:p>
           <a:p>
             <a:pPr lvl="1"/>
             <a:r>
-              <a:rPr lang="en-US" smtClean="0"/>
+              <a:rPr lang="en-US"/>
               <a:t>Second level</a:t>
             </a:r>
           </a:p>
           <a:p>
             <a:pPr lvl="2"/>
             <a:r>
-              <a:rPr lang="en-US" smtClean="0"/>
+              <a:rPr lang="en-US"/>
               <a:t>Third level</a:t>
             </a:r>
           </a:p>
           <a:p>
             <a:pPr lvl="3"/>
             <a:r>
-              <a:rPr lang="en-US" smtClean="0"/>
+              <a:rPr lang="en-US"/>
               <a:t>Fourth level</a:t>
             </a:r>
           </a:p>
           <a:p>
             <a:pPr lvl="4"/>
             <a:r>
-              <a:rPr lang="en-US" smtClean="0"/>
+              <a:rPr lang="en-US"/>
               <a:t>Fifth level</a:t>
             </a:r>
-            <a:endParaRPr lang="en-US"/>
           </a:p>
         </p:txBody>
       </p:sp>
@@ -469,7 +481,7 @@
           <a:p>
             <a:fld id="{5BCAD085-E8A6-8845-BD4E-CB4CCA059FC4}" type="datetimeFigureOut">
               <a:rPr lang="en-US" smtClean="0"/>
-              <a:t>1/27/13</a:t>
+              <a:t>6/13/2026</a:t>
             </a:fld>
             <a:endParaRPr lang="en-US"/>
           </a:p>
@@ -568,10 +580,9 @@
           <a:lstStyle/>
           <a:p>
             <a:r>
-              <a:rPr lang="en-US" smtClean="0"/>
+              <a:rPr lang="en-US"/>
               <a:t>Click to edit Master title style</a:t>
             </a:r>
-            <a:endParaRPr lang="en-US"/>
           </a:p>
         </p:txBody>
       </p:sp>
@@ -597,38 +608,37 @@
           <a:p>
             <a:pPr lvl="0"/>
             <a:r>
-              <a:rPr lang="en-US" smtClean="0"/>
+              <a:rPr lang="en-US"/>
               <a:t>Click to edit Master text styles</a:t>
             </a:r>
           </a:p>
           <a:p>
             <a:pPr lvl="1"/>
             <a:r>
-              <a:rPr lang="en-US" smtClean="0"/>
+              <a:rPr lang="en-US"/>
               <a:t>Second level</a:t>
             </a:r>
           </a:p>
           <a:p>
             <a:pPr lvl="2"/>
             <a:r>
-              <a:rPr lang="en-US" smtClean="0"/>
+              <a:rPr lang="en-US"/>
               <a:t>Third level</a:t>
             </a:r>
           </a:p>
           <a:p>
             <a:pPr lvl="3"/>
             <a:r>
-              <a:rPr lang="en-US" smtClean="0"/>
+              <a:rPr lang="en-US"/>
               <a:t>Fourth level</a:t>
             </a:r>
           </a:p>
           <a:p>
             <a:pPr lvl="4"/>
             <a:r>
-              <a:rPr lang="en-US" smtClean="0"/>
+              <a:rPr lang="en-US"/>
               <a:t>Fifth level</a:t>
             </a:r>
-            <a:endParaRPr lang="en-US"/>
           </a:p>
         </p:txBody>
       </p:sp>
@@ -649,7 +659,7 @@
           <a:p>
             <a:fld id="{5BCAD085-E8A6-8845-BD4E-CB4CCA059FC4}" type="datetimeFigureOut">
               <a:rPr lang="en-US" smtClean="0"/>
-              <a:t>1/27/13</a:t>
+              <a:t>6/13/2026</a:t>
             </a:fld>
             <a:endParaRPr lang="en-US"/>
           </a:p>
@@ -743,10 +753,9 @@
           <a:lstStyle/>
           <a:p>
             <a:r>
-              <a:rPr lang="en-US" smtClean="0"/>
+              <a:rPr lang="en-US"/>
               <a:t>Click to edit Master title style</a:t>
             </a:r>
-            <a:endParaRPr lang="en-US"/>
           </a:p>
         </p:txBody>
       </p:sp>
@@ -767,38 +776,37 @@
           <a:p>
             <a:pPr lvl="0"/>
             <a:r>
-              <a:rPr lang="en-US" smtClean="0"/>
+              <a:rPr lang="en-US"/>
               <a:t>Click to edit Master text styles</a:t>
             </a:r>
           </a:p>
           <a:p>
             <a:pPr lvl="1"/>
             <a:r>
-              <a:rPr lang="en-US" smtClean="0"/>
+              <a:rPr lang="en-US"/>
               <a:t>Second level</a:t>
             </a:r>
           </a:p>
           <a:p>
             <a:pPr lvl="2"/>
             <a:r>
-              <a:rPr lang="en-US" smtClean="0"/>
+              <a:rPr lang="en-US"/>
               <a:t>Third level</a:t>
             </a:r>
           </a:p>
           <a:p>
             <a:pPr lvl="3"/>
             <a:r>
-              <a:rPr lang="en-US" smtClean="0"/>
+              <a:rPr lang="en-US"/>
               <a:t>Fourth level</a:t>
             </a:r>
           </a:p>
           <a:p>
             <a:pPr lvl="4"/>
             <a:r>
-              <a:rPr lang="en-US" smtClean="0"/>
+              <a:rPr lang="en-US"/>
               <a:t>Fifth level</a:t>
             </a:r>
-            <a:endParaRPr lang="en-US"/>
           </a:p>
         </p:txBody>
       </p:sp>
@@ -819,7 +827,7 @@
           <a:p>
             <a:fld id="{5BCAD085-E8A6-8845-BD4E-CB4CCA059FC4}" type="datetimeFigureOut">
               <a:rPr lang="en-US" smtClean="0"/>
-              <a:t>1/27/13</a:t>
+              <a:t>6/13/2026</a:t>
             </a:fld>
             <a:endParaRPr lang="en-US"/>
           </a:p>
@@ -922,10 +930,9 @@
           </a:lstStyle>
           <a:p>
             <a:r>
-              <a:rPr lang="en-US" smtClean="0"/>
+              <a:rPr lang="en-US"/>
               <a:t>Click to edit Master title style</a:t>
             </a:r>
-            <a:endParaRPr lang="en-US"/>
           </a:p>
         </p:txBody>
       </p:sp>
@@ -1042,7 +1049,7 @@
           <a:p>
             <a:pPr lvl="0"/>
             <a:r>
-              <a:rPr lang="en-US" smtClean="0"/>
+              <a:rPr lang="en-US"/>
               <a:t>Click to edit Master text styles</a:t>
             </a:r>
           </a:p>
@@ -1065,7 +1072,7 @@
           <a:p>
             <a:fld id="{5BCAD085-E8A6-8845-BD4E-CB4CCA059FC4}" type="datetimeFigureOut">
               <a:rPr lang="en-US" smtClean="0"/>
-              <a:t>1/27/13</a:t>
+              <a:t>6/13/2026</a:t>
             </a:fld>
             <a:endParaRPr lang="en-US"/>
           </a:p>
@@ -1159,10 +1166,9 @@
           <a:lstStyle/>
           <a:p>
             <a:r>
-              <a:rPr lang="en-US" smtClean="0"/>
+              <a:rPr lang="en-US"/>
               <a:t>Click to edit Master title style</a:t>
             </a:r>
-            <a:endParaRPr lang="en-US"/>
           </a:p>
         </p:txBody>
       </p:sp>
@@ -1216,38 +1222,37 @@
           <a:p>
             <a:pPr lvl="0"/>
             <a:r>
-              <a:rPr lang="en-US" smtClean="0"/>
+              <a:rPr lang="en-US"/>
               <a:t>Click to edit Master text styles</a:t>
             </a:r>
           </a:p>
           <a:p>
             <a:pPr lvl="1"/>
             <a:r>
-              <a:rPr lang="en-US" smtClean="0"/>
+              <a:rPr lang="en-US"/>
               <a:t>Second level</a:t>
             </a:r>
           </a:p>
           <a:p>
             <a:pPr lvl="2"/>
             <a:r>
-              <a:rPr lang="en-US" smtClean="0"/>
+              <a:rPr lang="en-US"/>
               <a:t>Third level</a:t>
             </a:r>
           </a:p>
           <a:p>
             <a:pPr lvl="3"/>
             <a:r>
-              <a:rPr lang="en-US" smtClean="0"/>
+              <a:rPr lang="en-US"/>
               <a:t>Fourth level</a:t>
             </a:r>
           </a:p>
           <a:p>
             <a:pPr lvl="4"/>
             <a:r>
-              <a:rPr lang="en-US" smtClean="0"/>
+              <a:rPr lang="en-US"/>
               <a:t>Fifth level</a:t>
             </a:r>
-            <a:endParaRPr lang="en-US"/>
           </a:p>
         </p:txBody>
       </p:sp>
@@ -1301,38 +1306,37 @@
           <a:p>
             <a:pPr lvl="0"/>
             <a:r>
-              <a:rPr lang="en-US" smtClean="0"/>
+              <a:rPr lang="en-US"/>
               <a:t>Click to edit Master text styles</a:t>
             </a:r>
           </a:p>
           <a:p>
             <a:pPr lvl="1"/>
             <a:r>
-              <a:rPr lang="en-US" smtClean="0"/>
+              <a:rPr lang="en-US"/>
               <a:t>Second level</a:t>
             </a:r>
           </a:p>
           <a:p>
             <a:pPr lvl="2"/>
             <a:r>
-              <a:rPr lang="en-US" smtClean="0"/>
+              <a:rPr lang="en-US"/>
               <a:t>Third level</a:t>
             </a:r>
           </a:p>
           <a:p>
             <a:pPr lvl="3"/>
             <a:r>
-              <a:rPr lang="en-US" smtClean="0"/>
+              <a:rPr lang="en-US"/>
               <a:t>Fourth level</a:t>
             </a:r>
           </a:p>
           <a:p>
             <a:pPr lvl="4"/>
             <a:r>
-              <a:rPr lang="en-US" smtClean="0"/>
+              <a:rPr lang="en-US"/>
               <a:t>Fifth level</a:t>
             </a:r>
-            <a:endParaRPr lang="en-US"/>
           </a:p>
         </p:txBody>
       </p:sp>
@@ -1353,7 +1357,7 @@
           <a:p>
             <a:fld id="{5BCAD085-E8A6-8845-BD4E-CB4CCA059FC4}" type="datetimeFigureOut">
               <a:rPr lang="en-US" smtClean="0"/>
-              <a:t>1/27/13</a:t>
+              <a:t>6/13/2026</a:t>
             </a:fld>
             <a:endParaRPr lang="en-US"/>
           </a:p>
@@ -1451,10 +1455,9 @@
           </a:lstStyle>
           <a:p>
             <a:r>
-              <a:rPr lang="en-US" smtClean="0"/>
+              <a:rPr lang="en-US"/>
               <a:t>Click to edit Master title style</a:t>
             </a:r>
-            <a:endParaRPr lang="en-US"/>
           </a:p>
         </p:txBody>
       </p:sp>
@@ -1517,7 +1520,7 @@
           <a:p>
             <a:pPr lvl="0"/>
             <a:r>
-              <a:rPr lang="en-US" smtClean="0"/>
+              <a:rPr lang="en-US"/>
               <a:t>Click to edit Master text styles</a:t>
             </a:r>
           </a:p>
@@ -1573,38 +1576,37 @@
           <a:p>
             <a:pPr lvl="0"/>
             <a:r>
-              <a:rPr lang="en-US" smtClean="0"/>
+              <a:rPr lang="en-US"/>
               <a:t>Click to edit Master text styles</a:t>
             </a:r>
           </a:p>
           <a:p>
             <a:pPr lvl="1"/>
             <a:r>
-              <a:rPr lang="en-US" smtClean="0"/>
+              <a:rPr lang="en-US"/>
               <a:t>Second level</a:t>
             </a:r>
           </a:p>
           <a:p>
             <a:pPr lvl="2"/>
             <a:r>
-              <a:rPr lang="en-US" smtClean="0"/>
+              <a:rPr lang="en-US"/>
               <a:t>Third level</a:t>
             </a:r>
           </a:p>
           <a:p>
             <a:pPr lvl="3"/>
             <a:r>
-              <a:rPr lang="en-US" smtClean="0"/>
+              <a:rPr lang="en-US"/>
               <a:t>Fourth level</a:t>
             </a:r>
           </a:p>
           <a:p>
             <a:pPr lvl="4"/>
             <a:r>
-              <a:rPr lang="en-US" smtClean="0"/>
+              <a:rPr lang="en-US"/>
               <a:t>Fifth level</a:t>
             </a:r>
-            <a:endParaRPr lang="en-US"/>
           </a:p>
         </p:txBody>
       </p:sp>
@@ -1667,7 +1669,7 @@
           <a:p>
             <a:pPr lvl="0"/>
             <a:r>
-              <a:rPr lang="en-US" smtClean="0"/>
+              <a:rPr lang="en-US"/>
               <a:t>Click to edit Master text styles</a:t>
             </a:r>
           </a:p>
@@ -1723,38 +1725,37 @@
           <a:p>
             <a:pPr lvl="0"/>
             <a:r>
-              <a:rPr lang="en-US" smtClean="0"/>
+              <a:rPr lang="en-US"/>
               <a:t>Click to edit Master text styles</a:t>
             </a:r>
           </a:p>
           <a:p>
             <a:pPr lvl="1"/>
             <a:r>
-              <a:rPr lang="en-US" smtClean="0"/>
+              <a:rPr lang="en-US"/>
               <a:t>Second level</a:t>
             </a:r>
           </a:p>
           <a:p>
             <a:pPr lvl="2"/>
             <a:r>
-              <a:rPr lang="en-US" smtClean="0"/>
+              <a:rPr lang="en-US"/>
               <a:t>Third level</a:t>
             </a:r>
           </a:p>
           <a:p>
             <a:pPr lvl="3"/>
             <a:r>
-              <a:rPr lang="en-US" smtClean="0"/>
+              <a:rPr lang="en-US"/>
               <a:t>Fourth level</a:t>
             </a:r>
           </a:p>
           <a:p>
             <a:pPr lvl="4"/>
             <a:r>
-              <a:rPr lang="en-US" smtClean="0"/>
+              <a:rPr lang="en-US"/>
               <a:t>Fifth level</a:t>
             </a:r>
-            <a:endParaRPr lang="en-US"/>
           </a:p>
         </p:txBody>
       </p:sp>
@@ -1775,7 +1776,7 @@
           <a:p>
             <a:fld id="{5BCAD085-E8A6-8845-BD4E-CB4CCA059FC4}" type="datetimeFigureOut">
               <a:rPr lang="en-US" smtClean="0"/>
-              <a:t>1/27/13</a:t>
+              <a:t>6/13/2026</a:t>
             </a:fld>
             <a:endParaRPr lang="en-US"/>
           </a:p>
@@ -1869,10 +1870,9 @@
           <a:lstStyle/>
           <a:p>
             <a:r>
-              <a:rPr lang="en-US" smtClean="0"/>
+              <a:rPr lang="en-US"/>
               <a:t>Click to edit Master title style</a:t>
             </a:r>
-            <a:endParaRPr lang="en-US"/>
           </a:p>
         </p:txBody>
       </p:sp>
@@ -1893,7 +1893,7 @@
           <a:p>
             <a:fld id="{5BCAD085-E8A6-8845-BD4E-CB4CCA059FC4}" type="datetimeFigureOut">
               <a:rPr lang="en-US" smtClean="0"/>
-              <a:t>1/27/13</a:t>
+              <a:t>6/13/2026</a:t>
             </a:fld>
             <a:endParaRPr lang="en-US"/>
           </a:p>
@@ -1988,7 +1988,7 @@
           <a:p>
             <a:fld id="{5BCAD085-E8A6-8845-BD4E-CB4CCA059FC4}" type="datetimeFigureOut">
               <a:rPr lang="en-US" smtClean="0"/>
-              <a:t>1/27/13</a:t>
+              <a:t>6/13/2026</a:t>
             </a:fld>
             <a:endParaRPr lang="en-US"/>
           </a:p>
@@ -2091,10 +2091,9 @@
           </a:lstStyle>
           <a:p>
             <a:r>
-              <a:rPr lang="en-US" smtClean="0"/>
+              <a:rPr lang="en-US"/>
               <a:t>Click to edit Master title style</a:t>
             </a:r>
-            <a:endParaRPr lang="en-US"/>
           </a:p>
         </p:txBody>
       </p:sp>
@@ -2148,38 +2147,37 @@
           <a:p>
             <a:pPr lvl="0"/>
             <a:r>
-              <a:rPr lang="en-US" smtClean="0"/>
+              <a:rPr lang="en-US"/>
               <a:t>Click to edit Master text styles</a:t>
             </a:r>
           </a:p>
           <a:p>
             <a:pPr lvl="1"/>
             <a:r>
-              <a:rPr lang="en-US" smtClean="0"/>
+              <a:rPr lang="en-US"/>
               <a:t>Second level</a:t>
             </a:r>
           </a:p>
           <a:p>
             <a:pPr lvl="2"/>
             <a:r>
-              <a:rPr lang="en-US" smtClean="0"/>
+              <a:rPr lang="en-US"/>
               <a:t>Third level</a:t>
             </a:r>
           </a:p>
           <a:p>
             <a:pPr lvl="3"/>
             <a:r>
-              <a:rPr lang="en-US" smtClean="0"/>
+              <a:rPr lang="en-US"/>
               <a:t>Fourth level</a:t>
             </a:r>
           </a:p>
           <a:p>
             <a:pPr lvl="4"/>
             <a:r>
-              <a:rPr lang="en-US" smtClean="0"/>
+              <a:rPr lang="en-US"/>
               <a:t>Fifth level</a:t>
             </a:r>
-            <a:endParaRPr lang="en-US"/>
           </a:p>
         </p:txBody>
       </p:sp>
@@ -2242,7 +2240,7 @@
           <a:p>
             <a:pPr lvl="0"/>
             <a:r>
-              <a:rPr lang="en-US" smtClean="0"/>
+              <a:rPr lang="en-US"/>
               <a:t>Click to edit Master text styles</a:t>
             </a:r>
           </a:p>
@@ -2265,7 +2263,7 @@
           <a:p>
             <a:fld id="{5BCAD085-E8A6-8845-BD4E-CB4CCA059FC4}" type="datetimeFigureOut">
               <a:rPr lang="en-US" smtClean="0"/>
-              <a:t>1/27/13</a:t>
+              <a:t>6/13/2026</a:t>
             </a:fld>
             <a:endParaRPr lang="en-US"/>
           </a:p>
@@ -2368,10 +2366,9 @@
           </a:lstStyle>
           <a:p>
             <a:r>
-              <a:rPr lang="en-US" smtClean="0"/>
+              <a:rPr lang="en-US"/>
               <a:t>Click to edit Master title style</a:t>
             </a:r>
-            <a:endParaRPr lang="en-US"/>
           </a:p>
         </p:txBody>
       </p:sp>
@@ -2495,7 +2492,7 @@
           <a:p>
             <a:pPr lvl="0"/>
             <a:r>
-              <a:rPr lang="en-US" smtClean="0"/>
+              <a:rPr lang="en-US"/>
               <a:t>Click to edit Master text styles</a:t>
             </a:r>
           </a:p>
@@ -2518,7 +2515,7 @@
           <a:p>
             <a:fld id="{5BCAD085-E8A6-8845-BD4E-CB4CCA059FC4}" type="datetimeFigureOut">
               <a:rPr lang="en-US" smtClean="0"/>
-              <a:t>1/27/13</a:t>
+              <a:t>6/13/2026</a:t>
             </a:fld>
             <a:endParaRPr lang="en-US"/>
           </a:p>
@@ -2627,10 +2624,9 @@
           <a:lstStyle/>
           <a:p>
             <a:r>
-              <a:rPr lang="en-US" smtClean="0"/>
+              <a:rPr lang="en-US"/>
               <a:t>Click to edit Master title style</a:t>
             </a:r>
-            <a:endParaRPr lang="en-US"/>
           </a:p>
         </p:txBody>
       </p:sp>
@@ -2661,38 +2657,37 @@
           <a:p>
             <a:pPr lvl="0"/>
             <a:r>
-              <a:rPr lang="en-US" smtClean="0"/>
+              <a:rPr lang="en-US"/>
               <a:t>Click to edit Master text styles</a:t>
             </a:r>
           </a:p>
           <a:p>
             <a:pPr lvl="1"/>
             <a:r>
-              <a:rPr lang="en-US" smtClean="0"/>
+              <a:rPr lang="en-US"/>
               <a:t>Second level</a:t>
             </a:r>
           </a:p>
           <a:p>
             <a:pPr lvl="2"/>
             <a:r>
-              <a:rPr lang="en-US" smtClean="0"/>
+              <a:rPr lang="en-US"/>
               <a:t>Third level</a:t>
             </a:r>
           </a:p>
           <a:p>
             <a:pPr lvl="3"/>
             <a:r>
-              <a:rPr lang="en-US" smtClean="0"/>
+              <a:rPr lang="en-US"/>
               <a:t>Fourth level</a:t>
             </a:r>
           </a:p>
           <a:p>
             <a:pPr lvl="4"/>
             <a:r>
-              <a:rPr lang="en-US" smtClean="0"/>
+              <a:rPr lang="en-US"/>
               <a:t>Fifth level</a:t>
             </a:r>
-            <a:endParaRPr lang="en-US"/>
           </a:p>
         </p:txBody>
       </p:sp>
@@ -2731,7 +2726,7 @@
           <a:p>
             <a:fld id="{5BCAD085-E8A6-8845-BD4E-CB4CCA059FC4}" type="datetimeFigureOut">
               <a:rPr lang="en-US" smtClean="0"/>
-              <a:t>1/27/13</a:t>
+              <a:t>6/13/2026</a:t>
             </a:fld>
             <a:endParaRPr lang="en-US"/>
           </a:p>
@@ -3090,7 +3085,7 @@
 </file>
 
 <file path=ppt/slides/slide1.xml><?xml version="1.0" encoding="utf-8"?>
-<p:sld xmlns:a="http://schemas.openxmlformats.org/drawingml/2006/main" xmlns:p="http://schemas.openxmlformats.org/presentationml/2006/main" xmlns:r="http://schemas.openxmlformats.org/officeDocument/2006/relationships">
+<p:sld xmlns:a="http://schemas.openxmlformats.org/drawingml/2006/main" xmlns:r="http://schemas.openxmlformats.org/officeDocument/2006/relationships" xmlns:p="http://schemas.openxmlformats.org/presentationml/2006/main">
   <p:cSld>
     <p:spTree>
       <p:nvGrpSpPr>
@@ -3098,180 +3093,118 @@
         <p:cNvGrpSpPr/>
         <p:nvPr/>
       </p:nvGrpSpPr>
-      <p:grpSpPr/>
-      <p:sp>
-        <p:nvSpPr>
-          <p:cNvPr id="2" name="Rectangle 1"/>
-          <p:cNvSpPr/>
-          <p:nvPr/>
-        </p:nvSpPr>
-        <p:spPr>
-          <a:xfrm>
-            <a:off x="0" y="0"/>
-            <a:ext cx="12188952" cy="6858000"/>
-          </a:xfrm>
-          <a:prstGeom prst="rect">
-            <a:avLst/>
-          </a:prstGeom>
-          <a:solidFill>
-            <a:srgbClr val="0D2137"/>
-          </a:solidFill>
-          <a:ln>
-            <a:noFill/>
-          </a:ln>
-        </p:spPr>
-        <p:style>
-          <a:lnRef idx="1">
-            <a:schemeClr val="accent1"/>
-          </a:lnRef>
-          <a:fillRef idx="3">
-            <a:schemeClr val="accent1"/>
-          </a:fillRef>
-          <a:effectRef idx="2">
-            <a:schemeClr val="accent1"/>
-          </a:effectRef>
-          <a:fontRef idx="minor">
-            <a:schemeClr val="lt1"/>
-          </a:fontRef>
-        </p:style>
-        <p:txBody>
-          <a:bodyPr rtlCol="0" anchor="ctr"/>
+      <p:grpSpPr>
+        <a:xfrm>
+          <a:off x="0" y="0"/>
+          <a:ext cx="0" cy="0"/>
+          <a:chOff x="0" y="0"/>
+          <a:chExt cx="0" cy="0"/>
+        </a:xfrm>
+      </p:grpSpPr>
+      <p:sp>
+        <p:nvSpPr>
+          <p:cNvPr id="5" name="TextBox 4"/>
+          <p:cNvSpPr txBox="1"/>
+          <p:nvPr/>
+        </p:nvSpPr>
+        <p:spPr>
+          <a:xfrm>
+            <a:off x="0" y="1011644"/>
+            <a:ext cx="12188952" cy="923330"/>
+          </a:xfrm>
+          <a:prstGeom prst="rect">
+            <a:avLst/>
+          </a:prstGeom>
+          <a:noFill/>
+        </p:spPr>
+        <p:txBody>
+          <a:bodyPr wrap="square">
+            <a:spAutoFit/>
+          </a:bodyPr>
           <a:lstStyle/>
           <a:p>
             <a:pPr algn="ctr"/>
-          </a:p>
-        </p:txBody>
-      </p:sp>
-      <p:sp>
-        <p:nvSpPr>
-          <p:cNvPr id="3" name="Rectangle 2"/>
-          <p:cNvSpPr/>
-          <p:nvPr/>
-        </p:nvSpPr>
-        <p:spPr>
-          <a:xfrm>
-            <a:off x="0" y="2606040"/>
-            <a:ext cx="12188952" cy="54864"/>
-          </a:xfrm>
-          <a:prstGeom prst="rect">
-            <a:avLst/>
-          </a:prstGeom>
-          <a:solidFill>
-            <a:srgbClr val="1565C0"/>
-          </a:solidFill>
-          <a:ln>
-            <a:noFill/>
-          </a:ln>
-        </p:spPr>
-        <p:style>
-          <a:lnRef idx="1">
-            <a:schemeClr val="accent1"/>
-          </a:lnRef>
-          <a:fillRef idx="3">
-            <a:schemeClr val="accent1"/>
-          </a:fillRef>
-          <a:effectRef idx="2">
-            <a:schemeClr val="accent1"/>
-          </a:effectRef>
-          <a:fontRef idx="minor">
-            <a:schemeClr val="lt1"/>
-          </a:fontRef>
-        </p:style>
-        <p:txBody>
-          <a:bodyPr rtlCol="0" anchor="ctr"/>
+            <a:r>
+              <a:rPr sz="5400" b="1" dirty="0">
+                <a:latin typeface="Times New Roman" panose="02020603050405020304" pitchFamily="18" charset="0"/>
+                <a:cs typeface="Times New Roman" panose="02020603050405020304" pitchFamily="18" charset="0"/>
+              </a:rPr>
+              <a:t>BLUESTOCK FINTECH</a:t>
+            </a:r>
+          </a:p>
+        </p:txBody>
+      </p:sp>
+      <p:sp>
+        <p:nvSpPr>
+          <p:cNvPr id="6" name="TextBox 5"/>
+          <p:cNvSpPr txBox="1"/>
+          <p:nvPr/>
+        </p:nvSpPr>
+        <p:spPr>
+          <a:xfrm>
+            <a:off x="-1062869" y="2915220"/>
+            <a:ext cx="7326508" cy="1061829"/>
+          </a:xfrm>
+          <a:prstGeom prst="rect">
+            <a:avLst/>
+          </a:prstGeom>
+          <a:noFill/>
+        </p:spPr>
+        <p:txBody>
+          <a:bodyPr wrap="square">
+            <a:spAutoFit/>
+          </a:bodyPr>
           <a:lstStyle/>
           <a:p>
             <a:pPr algn="ctr"/>
-          </a:p>
-        </p:txBody>
-      </p:sp>
-      <p:sp>
-        <p:nvSpPr>
-          <p:cNvPr id="4" name="Rectangle 3"/>
-          <p:cNvSpPr/>
-          <p:nvPr/>
-        </p:nvSpPr>
-        <p:spPr>
-          <a:xfrm>
-            <a:off x="0" y="3703320"/>
-            <a:ext cx="12188952" cy="54864"/>
-          </a:xfrm>
-          <a:prstGeom prst="rect">
-            <a:avLst/>
-          </a:prstGeom>
-          <a:solidFill>
-            <a:srgbClr val="00897B"/>
-          </a:solidFill>
-          <a:ln>
-            <a:noFill/>
-          </a:ln>
-        </p:spPr>
-        <p:style>
-          <a:lnRef idx="1">
-            <a:schemeClr val="accent1"/>
-          </a:lnRef>
-          <a:fillRef idx="3">
-            <a:schemeClr val="accent1"/>
-          </a:fillRef>
-          <a:effectRef idx="2">
-            <a:schemeClr val="accent1"/>
-          </a:effectRef>
-          <a:fontRef idx="minor">
-            <a:schemeClr val="lt1"/>
-          </a:fontRef>
-        </p:style>
-        <p:txBody>
-          <a:bodyPr rtlCol="0" anchor="ctr"/>
-          <a:lstStyle/>
+            <a:r>
+              <a:rPr lang="en-US" sz="2100" dirty="0">
+                <a:latin typeface="Times New Roman" panose="02020603050405020304" pitchFamily="18" charset="0"/>
+                <a:cs typeface="Times New Roman" panose="02020603050405020304" pitchFamily="18" charset="0"/>
+              </a:rPr>
+              <a:t>Intern Name: Rudra Pawar </a:t>
+            </a:r>
+          </a:p>
           <a:p>
             <a:pPr algn="ctr"/>
-          </a:p>
-        </p:txBody>
-      </p:sp>
-      <p:sp>
-        <p:nvSpPr>
-          <p:cNvPr id="5" name="TextBox 4"/>
-          <p:cNvSpPr txBox="1"/>
-          <p:nvPr/>
-        </p:nvSpPr>
-        <p:spPr>
-          <a:xfrm>
-            <a:off x="0" y="411480"/>
-            <a:ext cx="12188952" cy="868680"/>
-          </a:xfrm>
-          <a:prstGeom prst="rect">
-            <a:avLst/>
-          </a:prstGeom>
-          <a:noFill/>
-        </p:spPr>
-        <p:txBody>
-          <a:bodyPr wrap="square">
-            <a:spAutoFit/>
-          </a:bodyPr>
-          <a:lstStyle/>
+            <a:r>
+              <a:rPr lang="en-US" sz="2100" dirty="0">
+                <a:latin typeface="Times New Roman" panose="02020603050405020304" pitchFamily="18" charset="0"/>
+                <a:cs typeface="Times New Roman" panose="02020603050405020304" pitchFamily="18" charset="0"/>
+              </a:rPr>
+              <a:t>   Topic: </a:t>
+            </a:r>
+            <a:r>
+              <a:rPr sz="2100" b="0" dirty="0">
+                <a:latin typeface="Times New Roman" panose="02020603050405020304" pitchFamily="18" charset="0"/>
+                <a:cs typeface="Times New Roman" panose="02020603050405020304" pitchFamily="18" charset="0"/>
+              </a:rPr>
+              <a:t>Mutual Fund Analytics</a:t>
+            </a:r>
+            <a:endParaRPr lang="en-US" sz="2100" b="0" dirty="0">
+              <a:latin typeface="Times New Roman" panose="02020603050405020304" pitchFamily="18" charset="0"/>
+              <a:cs typeface="Times New Roman" panose="02020603050405020304" pitchFamily="18" charset="0"/>
+            </a:endParaRPr>
+          </a:p>
           <a:p>
             <a:pPr algn="ctr"/>
-            <a:r>
-              <a:rPr sz="4000" b="1">
-                <a:solidFill>
-                  <a:srgbClr val="FFFFFF"/>
-                </a:solidFill>
-              </a:rPr>
-              <a:t>BLUESTOCK FINTECH</a:t>
-            </a:r>
-          </a:p>
-        </p:txBody>
-      </p:sp>
-      <p:sp>
-        <p:nvSpPr>
-          <p:cNvPr id="6" name="TextBox 5"/>
-          <p:cNvSpPr txBox="1"/>
-          <p:nvPr/>
-        </p:nvSpPr>
-        <p:spPr>
-          <a:xfrm>
-            <a:off x="0" y="1371600"/>
-            <a:ext cx="12188952" cy="548640"/>
+            <a:endParaRPr lang="en-US" sz="2100" b="0" dirty="0">
+              <a:latin typeface="Times New Roman" panose="02020603050405020304" pitchFamily="18" charset="0"/>
+              <a:cs typeface="Times New Roman" panose="02020603050405020304" pitchFamily="18" charset="0"/>
+            </a:endParaRPr>
+          </a:p>
+        </p:txBody>
+      </p:sp>
+      <p:sp>
+        <p:nvSpPr>
+          <p:cNvPr id="9" name="TextBox 8"/>
+          <p:cNvSpPr txBox="1"/>
+          <p:nvPr/>
+        </p:nvSpPr>
+        <p:spPr>
+          <a:xfrm>
+            <a:off x="-60468" y="4284147"/>
+            <a:ext cx="2743200" cy="400110"/>
           </a:xfrm>
           <a:prstGeom prst="rect">
             <a:avLst/>
@@ -3286,26 +3219,28 @@
           <a:p>
             <a:pPr algn="ctr"/>
             <a:r>
-              <a:rPr sz="2100" b="0">
-                <a:solidFill>
-                  <a:srgbClr val="B0C4DE"/>
-                </a:solidFill>
-              </a:rPr>
-              <a:t>Mutual Fund Analytics Platform</a:t>
-            </a:r>
-          </a:p>
-        </p:txBody>
-      </p:sp>
-      <p:sp>
-        <p:nvSpPr>
-          <p:cNvPr id="7" name="TextBox 6"/>
-          <p:cNvSpPr txBox="1"/>
-          <p:nvPr/>
-        </p:nvSpPr>
-        <p:spPr>
-          <a:xfrm>
-            <a:off x="0" y="1965960"/>
-            <a:ext cx="12188952" cy="457200"/>
+              <a:rPr sz="2000" b="1" dirty="0">
+                <a:solidFill>
+                  <a:srgbClr val="1565C0"/>
+                </a:solidFill>
+                <a:latin typeface="Times New Roman" panose="02020603050405020304" pitchFamily="18" charset="0"/>
+                <a:cs typeface="Times New Roman" panose="02020603050405020304" pitchFamily="18" charset="0"/>
+              </a:rPr>
+              <a:t>40</a:t>
+            </a:r>
+          </a:p>
+        </p:txBody>
+      </p:sp>
+      <p:sp>
+        <p:nvSpPr>
+          <p:cNvPr id="10" name="TextBox 9"/>
+          <p:cNvSpPr txBox="1"/>
+          <p:nvPr/>
+        </p:nvSpPr>
+        <p:spPr>
+          <a:xfrm>
+            <a:off x="573713" y="4375587"/>
+            <a:ext cx="2743200" cy="230832"/>
           </a:xfrm>
           <a:prstGeom prst="rect">
             <a:avLst/>
@@ -3320,71 +3255,64 @@
           <a:p>
             <a:pPr algn="ctr"/>
             <a:r>
-              <a:rPr sz="1200" b="0">
+              <a:rPr sz="900" b="0" dirty="0">
                 <a:solidFill>
                   <a:srgbClr val="94A3B8"/>
                 </a:solidFill>
-              </a:rPr>
-              <a:t>End-to-End Data Engineering  ·  ETL Pipeline  ·  Interactive Dashboard</a:t>
-            </a:r>
-          </a:p>
-        </p:txBody>
-      </p:sp>
-      <p:sp>
-        <p:nvSpPr>
-          <p:cNvPr id="8" name="Rectangle 7"/>
-          <p:cNvSpPr/>
-          <p:nvPr/>
-        </p:nvSpPr>
-        <p:spPr>
-          <a:xfrm>
-            <a:off x="868680" y="2880360"/>
-            <a:ext cx="2743200" cy="1005840"/>
-          </a:xfrm>
-          <a:prstGeom prst="rect">
-            <a:avLst/>
-          </a:prstGeom>
-          <a:solidFill>
-            <a:srgbClr val="0D2137"/>
-          </a:solidFill>
-          <a:ln w="9525">
-            <a:solidFill>
-              <a:srgbClr val="1565C0"/>
-            </a:solidFill>
-          </a:ln>
-        </p:spPr>
-        <p:style>
-          <a:lnRef idx="1">
-            <a:schemeClr val="accent1"/>
-          </a:lnRef>
-          <a:fillRef idx="3">
-            <a:schemeClr val="accent1"/>
-          </a:fillRef>
-          <a:effectRef idx="2">
-            <a:schemeClr val="accent1"/>
-          </a:effectRef>
-          <a:fontRef idx="minor">
-            <a:schemeClr val="lt1"/>
-          </a:fontRef>
-        </p:style>
-        <p:txBody>
-          <a:bodyPr rtlCol="0" anchor="ctr"/>
+                <a:latin typeface="Times New Roman" panose="02020603050405020304" pitchFamily="18" charset="0"/>
+                <a:cs typeface="Times New Roman" panose="02020603050405020304" pitchFamily="18" charset="0"/>
+              </a:rPr>
+              <a:t>Fund Schemes</a:t>
+            </a:r>
+          </a:p>
+        </p:txBody>
+      </p:sp>
+      <p:sp>
+        <p:nvSpPr>
+          <p:cNvPr id="12" name="TextBox 11"/>
+          <p:cNvSpPr txBox="1"/>
+          <p:nvPr/>
+        </p:nvSpPr>
+        <p:spPr>
+          <a:xfrm>
+            <a:off x="-60468" y="4622475"/>
+            <a:ext cx="2743200" cy="400110"/>
+          </a:xfrm>
+          <a:prstGeom prst="rect">
+            <a:avLst/>
+          </a:prstGeom>
+          <a:noFill/>
+        </p:spPr>
+        <p:txBody>
+          <a:bodyPr wrap="square">
+            <a:spAutoFit/>
+          </a:bodyPr>
           <a:lstStyle/>
           <a:p>
             <a:pPr algn="ctr"/>
-          </a:p>
-        </p:txBody>
-      </p:sp>
-      <p:sp>
-        <p:nvSpPr>
-          <p:cNvPr id="9" name="TextBox 8"/>
-          <p:cNvSpPr txBox="1"/>
-          <p:nvPr/>
-        </p:nvSpPr>
-        <p:spPr>
-          <a:xfrm>
-            <a:off x="868680" y="2971800"/>
-            <a:ext cx="2743200" cy="502920"/>
+            <a:r>
+              <a:rPr sz="2000" b="1" dirty="0">
+                <a:solidFill>
+                  <a:srgbClr val="1565C0"/>
+                </a:solidFill>
+                <a:latin typeface="Times New Roman" panose="02020603050405020304" pitchFamily="18" charset="0"/>
+                <a:cs typeface="Times New Roman" panose="02020603050405020304" pitchFamily="18" charset="0"/>
+              </a:rPr>
+              <a:t>10</a:t>
+            </a:r>
+          </a:p>
+        </p:txBody>
+      </p:sp>
+      <p:sp>
+        <p:nvSpPr>
+          <p:cNvPr id="13" name="TextBox 12"/>
+          <p:cNvSpPr txBox="1"/>
+          <p:nvPr/>
+        </p:nvSpPr>
+        <p:spPr>
+          <a:xfrm>
+            <a:off x="423278" y="4744592"/>
+            <a:ext cx="2743200" cy="230832"/>
           </a:xfrm>
           <a:prstGeom prst="rect">
             <a:avLst/>
@@ -3399,26 +3327,64 @@
           <a:p>
             <a:pPr algn="ctr"/>
             <a:r>
-              <a:rPr sz="2000" b="1">
+              <a:rPr sz="900" b="0" dirty="0">
+                <a:solidFill>
+                  <a:srgbClr val="94A3B8"/>
+                </a:solidFill>
+                <a:latin typeface="Times New Roman" panose="02020603050405020304" pitchFamily="18" charset="0"/>
+                <a:cs typeface="Times New Roman" panose="02020603050405020304" pitchFamily="18" charset="0"/>
+              </a:rPr>
+              <a:t>Datasets</a:t>
+            </a:r>
+          </a:p>
+        </p:txBody>
+      </p:sp>
+      <p:sp>
+        <p:nvSpPr>
+          <p:cNvPr id="15" name="TextBox 14"/>
+          <p:cNvSpPr txBox="1"/>
+          <p:nvPr/>
+        </p:nvSpPr>
+        <p:spPr>
+          <a:xfrm>
+            <a:off x="95865" y="5032609"/>
+            <a:ext cx="2743200" cy="400110"/>
+          </a:xfrm>
+          <a:prstGeom prst="rect">
+            <a:avLst/>
+          </a:prstGeom>
+          <a:noFill/>
+        </p:spPr>
+        <p:txBody>
+          <a:bodyPr wrap="square">
+            <a:spAutoFit/>
+          </a:bodyPr>
+          <a:lstStyle/>
+          <a:p>
+            <a:pPr algn="ctr"/>
+            <a:r>
+              <a:rPr sz="2000" b="1" dirty="0">
                 <a:solidFill>
                   <a:srgbClr val="1565C0"/>
                 </a:solidFill>
-              </a:rPr>
-              <a:t>40</a:t>
-            </a:r>
-          </a:p>
-        </p:txBody>
-      </p:sp>
-      <p:sp>
-        <p:nvSpPr>
-          <p:cNvPr id="10" name="TextBox 9"/>
-          <p:cNvSpPr txBox="1"/>
-          <p:nvPr/>
-        </p:nvSpPr>
-        <p:spPr>
-          <a:xfrm>
-            <a:off x="868680" y="3493008"/>
-            <a:ext cx="2743200" cy="320040"/>
+                <a:latin typeface="Times New Roman" panose="02020603050405020304" pitchFamily="18" charset="0"/>
+                <a:cs typeface="Times New Roman" panose="02020603050405020304" pitchFamily="18" charset="0"/>
+              </a:rPr>
+              <a:t>88K+</a:t>
+            </a:r>
+          </a:p>
+        </p:txBody>
+      </p:sp>
+      <p:sp>
+        <p:nvSpPr>
+          <p:cNvPr id="16" name="TextBox 15"/>
+          <p:cNvSpPr txBox="1"/>
+          <p:nvPr/>
+        </p:nvSpPr>
+        <p:spPr>
+          <a:xfrm>
+            <a:off x="573713" y="5150154"/>
+            <a:ext cx="2743200" cy="230832"/>
           </a:xfrm>
           <a:prstGeom prst="rect">
             <a:avLst/>
@@ -3433,71 +3399,64 @@
           <a:p>
             <a:pPr algn="ctr"/>
             <a:r>
-              <a:rPr sz="900" b="0">
+              <a:rPr sz="900" b="0" dirty="0">
                 <a:solidFill>
                   <a:srgbClr val="94A3B8"/>
                 </a:solidFill>
-              </a:rPr>
-              <a:t>Fund Schemes</a:t>
-            </a:r>
-          </a:p>
-        </p:txBody>
-      </p:sp>
-      <p:sp>
-        <p:nvSpPr>
-          <p:cNvPr id="11" name="Rectangle 10"/>
-          <p:cNvSpPr/>
-          <p:nvPr/>
-        </p:nvSpPr>
-        <p:spPr>
-          <a:xfrm>
-            <a:off x="3520439" y="2880360"/>
-            <a:ext cx="2743200" cy="1005840"/>
-          </a:xfrm>
-          <a:prstGeom prst="rect">
-            <a:avLst/>
-          </a:prstGeom>
-          <a:solidFill>
-            <a:srgbClr val="0D2137"/>
-          </a:solidFill>
-          <a:ln w="9525">
-            <a:solidFill>
-              <a:srgbClr val="1565C0"/>
-            </a:solidFill>
-          </a:ln>
-        </p:spPr>
-        <p:style>
-          <a:lnRef idx="1">
-            <a:schemeClr val="accent1"/>
-          </a:lnRef>
-          <a:fillRef idx="3">
-            <a:schemeClr val="accent1"/>
-          </a:fillRef>
-          <a:effectRef idx="2">
-            <a:schemeClr val="accent1"/>
-          </a:effectRef>
-          <a:fontRef idx="minor">
-            <a:schemeClr val="lt1"/>
-          </a:fontRef>
-        </p:style>
-        <p:txBody>
-          <a:bodyPr rtlCol="0" anchor="ctr"/>
+                <a:latin typeface="Times New Roman" panose="02020603050405020304" pitchFamily="18" charset="0"/>
+                <a:cs typeface="Times New Roman" panose="02020603050405020304" pitchFamily="18" charset="0"/>
+              </a:rPr>
+              <a:t>Rows</a:t>
+            </a:r>
+          </a:p>
+        </p:txBody>
+      </p:sp>
+      <p:sp>
+        <p:nvSpPr>
+          <p:cNvPr id="18" name="TextBox 17"/>
+          <p:cNvSpPr txBox="1"/>
+          <p:nvPr/>
+        </p:nvSpPr>
+        <p:spPr>
+          <a:xfrm>
+            <a:off x="159282" y="5431147"/>
+            <a:ext cx="2743200" cy="400110"/>
+          </a:xfrm>
+          <a:prstGeom prst="rect">
+            <a:avLst/>
+          </a:prstGeom>
+          <a:noFill/>
+        </p:spPr>
+        <p:txBody>
+          <a:bodyPr wrap="square">
+            <a:spAutoFit/>
+          </a:bodyPr>
           <a:lstStyle/>
           <a:p>
             <a:pPr algn="ctr"/>
-          </a:p>
-        </p:txBody>
-      </p:sp>
-      <p:sp>
-        <p:nvSpPr>
-          <p:cNvPr id="12" name="TextBox 11"/>
-          <p:cNvSpPr txBox="1"/>
-          <p:nvPr/>
-        </p:nvSpPr>
-        <p:spPr>
-          <a:xfrm>
-            <a:off x="3520439" y="2971800"/>
-            <a:ext cx="2743200" cy="502920"/>
+            <a:r>
+              <a:rPr sz="2000" b="1" dirty="0">
+                <a:solidFill>
+                  <a:srgbClr val="1565C0"/>
+                </a:solidFill>
+                <a:latin typeface="Times New Roman" panose="02020603050405020304" pitchFamily="18" charset="0"/>
+                <a:cs typeface="Times New Roman" panose="02020603050405020304" pitchFamily="18" charset="0"/>
+              </a:rPr>
+              <a:t>4.5 Yrs</a:t>
+            </a:r>
+          </a:p>
+        </p:txBody>
+      </p:sp>
+      <p:sp>
+        <p:nvSpPr>
+          <p:cNvPr id="19" name="TextBox 18"/>
+          <p:cNvSpPr txBox="1"/>
+          <p:nvPr/>
+        </p:nvSpPr>
+        <p:spPr>
+          <a:xfrm>
+            <a:off x="899159" y="5576358"/>
+            <a:ext cx="2743200" cy="230832"/>
           </a:xfrm>
           <a:prstGeom prst="rect">
             <a:avLst/>
@@ -3512,26 +3471,28 @@
           <a:p>
             <a:pPr algn="ctr"/>
             <a:r>
-              <a:rPr sz="2000" b="1">
-                <a:solidFill>
-                  <a:srgbClr val="1565C0"/>
-                </a:solidFill>
-              </a:rPr>
-              <a:t>10</a:t>
-            </a:r>
-          </a:p>
-        </p:txBody>
-      </p:sp>
-      <p:sp>
-        <p:nvSpPr>
-          <p:cNvPr id="13" name="TextBox 12"/>
-          <p:cNvSpPr txBox="1"/>
-          <p:nvPr/>
-        </p:nvSpPr>
-        <p:spPr>
-          <a:xfrm>
-            <a:off x="3520439" y="3493008"/>
-            <a:ext cx="2743200" cy="320040"/>
+              <a:rPr sz="900" b="0" dirty="0">
+                <a:solidFill>
+                  <a:srgbClr val="94A3B8"/>
+                </a:solidFill>
+                <a:latin typeface="Times New Roman" panose="02020603050405020304" pitchFamily="18" charset="0"/>
+                <a:cs typeface="Times New Roman" panose="02020603050405020304" pitchFamily="18" charset="0"/>
+              </a:rPr>
+              <a:t>NAV History</a:t>
+            </a:r>
+          </a:p>
+        </p:txBody>
+      </p:sp>
+      <p:sp>
+        <p:nvSpPr>
+          <p:cNvPr id="21" name="TextBox 20"/>
+          <p:cNvSpPr txBox="1"/>
+          <p:nvPr/>
+        </p:nvSpPr>
+        <p:spPr>
+          <a:xfrm>
+            <a:off x="169163" y="6561557"/>
+            <a:ext cx="12188952" cy="261610"/>
           </a:xfrm>
           <a:prstGeom prst="rect">
             <a:avLst/>
@@ -3546,306 +3507,34 @@
           <a:p>
             <a:pPr algn="ctr"/>
             <a:r>
-              <a:rPr sz="900" b="0">
+              <a:rPr sz="1100" b="0" dirty="0">
                 <a:solidFill>
                   <a:srgbClr val="94A3B8"/>
                 </a:solidFill>
-              </a:rPr>
-              <a:t>Datasets</a:t>
-            </a:r>
-          </a:p>
-        </p:txBody>
-      </p:sp>
-      <p:sp>
-        <p:nvSpPr>
-          <p:cNvPr id="14" name="Rectangle 13"/>
-          <p:cNvSpPr/>
-          <p:nvPr/>
-        </p:nvSpPr>
-        <p:spPr>
-          <a:xfrm>
-            <a:off x="6172200" y="2880360"/>
-            <a:ext cx="2743200" cy="1005840"/>
-          </a:xfrm>
-          <a:prstGeom prst="rect">
-            <a:avLst/>
-          </a:prstGeom>
-          <a:solidFill>
-            <a:srgbClr val="0D2137"/>
-          </a:solidFill>
-          <a:ln w="9525">
-            <a:solidFill>
-              <a:srgbClr val="1565C0"/>
-            </a:solidFill>
-          </a:ln>
-        </p:spPr>
-        <p:style>
-          <a:lnRef idx="1">
-            <a:schemeClr val="accent1"/>
-          </a:lnRef>
-          <a:fillRef idx="3">
-            <a:schemeClr val="accent1"/>
-          </a:fillRef>
-          <a:effectRef idx="2">
-            <a:schemeClr val="accent1"/>
-          </a:effectRef>
-          <a:fontRef idx="minor">
-            <a:schemeClr val="lt1"/>
-          </a:fontRef>
-        </p:style>
-        <p:txBody>
-          <a:bodyPr rtlCol="0" anchor="ctr"/>
-          <a:lstStyle/>
-          <a:p>
-            <a:pPr algn="ctr"/>
-          </a:p>
-        </p:txBody>
-      </p:sp>
-      <p:sp>
-        <p:nvSpPr>
-          <p:cNvPr id="15" name="TextBox 14"/>
-          <p:cNvSpPr txBox="1"/>
-          <p:nvPr/>
-        </p:nvSpPr>
-        <p:spPr>
-          <a:xfrm>
-            <a:off x="6172200" y="2971800"/>
-            <a:ext cx="2743200" cy="502920"/>
-          </a:xfrm>
-          <a:prstGeom prst="rect">
-            <a:avLst/>
-          </a:prstGeom>
-          <a:noFill/>
-        </p:spPr>
-        <p:txBody>
-          <a:bodyPr wrap="square">
-            <a:spAutoFit/>
-          </a:bodyPr>
-          <a:lstStyle/>
-          <a:p>
-            <a:pPr algn="ctr"/>
-            <a:r>
-              <a:rPr sz="2000" b="1">
-                <a:solidFill>
-                  <a:srgbClr val="1565C0"/>
-                </a:solidFill>
-              </a:rPr>
-              <a:t>88K+</a:t>
-            </a:r>
-          </a:p>
-        </p:txBody>
-      </p:sp>
-      <p:sp>
-        <p:nvSpPr>
-          <p:cNvPr id="16" name="TextBox 15"/>
-          <p:cNvSpPr txBox="1"/>
-          <p:nvPr/>
-        </p:nvSpPr>
-        <p:spPr>
-          <a:xfrm>
-            <a:off x="6172200" y="3493008"/>
-            <a:ext cx="2743200" cy="320040"/>
-          </a:xfrm>
-          <a:prstGeom prst="rect">
-            <a:avLst/>
-          </a:prstGeom>
-          <a:noFill/>
-        </p:spPr>
-        <p:txBody>
-          <a:bodyPr wrap="square">
-            <a:spAutoFit/>
-          </a:bodyPr>
-          <a:lstStyle/>
-          <a:p>
-            <a:pPr algn="ctr"/>
-            <a:r>
-              <a:rPr sz="900" b="0">
+                <a:latin typeface="Times New Roman" panose="02020603050405020304" pitchFamily="18" charset="0"/>
+                <a:cs typeface="Times New Roman" panose="02020603050405020304" pitchFamily="18" charset="0"/>
+              </a:rPr>
+              <a:t>Prepared by: Intern / Data Analyst — </a:t>
+            </a:r>
+            <a:r>
+              <a:rPr sz="1100" b="0" dirty="0" err="1">
                 <a:solidFill>
                   <a:srgbClr val="94A3B8"/>
                 </a:solidFill>
-              </a:rPr>
-              <a:t>Rows</a:t>
-            </a:r>
-          </a:p>
-        </p:txBody>
-      </p:sp>
-      <p:sp>
-        <p:nvSpPr>
-          <p:cNvPr id="17" name="Rectangle 16"/>
-          <p:cNvSpPr/>
-          <p:nvPr/>
-        </p:nvSpPr>
-        <p:spPr>
-          <a:xfrm>
-            <a:off x="8823959" y="2880360"/>
-            <a:ext cx="2743200" cy="1005840"/>
-          </a:xfrm>
-          <a:prstGeom prst="rect">
-            <a:avLst/>
-          </a:prstGeom>
-          <a:solidFill>
-            <a:srgbClr val="0D2137"/>
-          </a:solidFill>
-          <a:ln w="9525">
-            <a:solidFill>
-              <a:srgbClr val="1565C0"/>
-            </a:solidFill>
-          </a:ln>
-        </p:spPr>
-        <p:style>
-          <a:lnRef idx="1">
-            <a:schemeClr val="accent1"/>
-          </a:lnRef>
-          <a:fillRef idx="3">
-            <a:schemeClr val="accent1"/>
-          </a:fillRef>
-          <a:effectRef idx="2">
-            <a:schemeClr val="accent1"/>
-          </a:effectRef>
-          <a:fontRef idx="minor">
-            <a:schemeClr val="lt1"/>
-          </a:fontRef>
-        </p:style>
-        <p:txBody>
-          <a:bodyPr rtlCol="0" anchor="ctr"/>
-          <a:lstStyle/>
-          <a:p>
-            <a:pPr algn="ctr"/>
-          </a:p>
-        </p:txBody>
-      </p:sp>
-      <p:sp>
-        <p:nvSpPr>
-          <p:cNvPr id="18" name="TextBox 17"/>
-          <p:cNvSpPr txBox="1"/>
-          <p:nvPr/>
-        </p:nvSpPr>
-        <p:spPr>
-          <a:xfrm>
-            <a:off x="8823959" y="2971800"/>
-            <a:ext cx="2743200" cy="502920"/>
-          </a:xfrm>
-          <a:prstGeom prst="rect">
-            <a:avLst/>
-          </a:prstGeom>
-          <a:noFill/>
-        </p:spPr>
-        <p:txBody>
-          <a:bodyPr wrap="square">
-            <a:spAutoFit/>
-          </a:bodyPr>
-          <a:lstStyle/>
-          <a:p>
-            <a:pPr algn="ctr"/>
-            <a:r>
-              <a:rPr sz="2000" b="1">
-                <a:solidFill>
-                  <a:srgbClr val="1565C0"/>
-                </a:solidFill>
-              </a:rPr>
-              <a:t>4.5 Yrs</a:t>
-            </a:r>
-          </a:p>
-        </p:txBody>
-      </p:sp>
-      <p:sp>
-        <p:nvSpPr>
-          <p:cNvPr id="19" name="TextBox 18"/>
-          <p:cNvSpPr txBox="1"/>
-          <p:nvPr/>
-        </p:nvSpPr>
-        <p:spPr>
-          <a:xfrm>
-            <a:off x="8823959" y="3493008"/>
-            <a:ext cx="2743200" cy="320040"/>
-          </a:xfrm>
-          <a:prstGeom prst="rect">
-            <a:avLst/>
-          </a:prstGeom>
-          <a:noFill/>
-        </p:spPr>
-        <p:txBody>
-          <a:bodyPr wrap="square">
-            <a:spAutoFit/>
-          </a:bodyPr>
-          <a:lstStyle/>
-          <a:p>
-            <a:pPr algn="ctr"/>
-            <a:r>
-              <a:rPr sz="900" b="0">
+                <a:latin typeface="Times New Roman" panose="02020603050405020304" pitchFamily="18" charset="0"/>
+                <a:cs typeface="Times New Roman" panose="02020603050405020304" pitchFamily="18" charset="0"/>
+              </a:rPr>
+              <a:t>Bluestock</a:t>
+            </a:r>
+            <a:r>
+              <a:rPr sz="1100" b="0" dirty="0">
                 <a:solidFill>
                   <a:srgbClr val="94A3B8"/>
                 </a:solidFill>
-              </a:rPr>
-              <a:t>NAV History</a:t>
-            </a:r>
-          </a:p>
-        </p:txBody>
-      </p:sp>
-      <p:sp>
-        <p:nvSpPr>
-          <p:cNvPr id="20" name="TextBox 19"/>
-          <p:cNvSpPr txBox="1"/>
-          <p:nvPr/>
-        </p:nvSpPr>
-        <p:spPr>
-          <a:xfrm>
-            <a:off x="0" y="4114800"/>
-            <a:ext cx="12188952" cy="365760"/>
-          </a:xfrm>
-          <a:prstGeom prst="rect">
-            <a:avLst/>
-          </a:prstGeom>
-          <a:noFill/>
-        </p:spPr>
-        <p:txBody>
-          <a:bodyPr wrap="square">
-            <a:spAutoFit/>
-          </a:bodyPr>
-          <a:lstStyle/>
-          <a:p>
-            <a:pPr algn="ctr"/>
-            <a:r>
-              <a:rPr sz="1100" b="0">
-                <a:solidFill>
-                  <a:srgbClr val="94A3B8"/>
-                </a:solidFill>
-              </a:rPr>
-              <a:t>Individual Capstone  |  June 2026  |  Bluestock Fintech Pvt. Ltd.</a:t>
-            </a:r>
-          </a:p>
-        </p:txBody>
-      </p:sp>
-      <p:sp>
-        <p:nvSpPr>
-          <p:cNvPr id="21" name="TextBox 20"/>
-          <p:cNvSpPr txBox="1"/>
-          <p:nvPr/>
-        </p:nvSpPr>
-        <p:spPr>
-          <a:xfrm>
-            <a:off x="0" y="4526280"/>
-            <a:ext cx="12188952" cy="365760"/>
-          </a:xfrm>
-          <a:prstGeom prst="rect">
-            <a:avLst/>
-          </a:prstGeom>
-          <a:noFill/>
-        </p:spPr>
-        <p:txBody>
-          <a:bodyPr wrap="square">
-            <a:spAutoFit/>
-          </a:bodyPr>
-          <a:lstStyle/>
-          <a:p>
-            <a:pPr algn="ctr"/>
-            <a:r>
-              <a:rPr sz="1100" b="0">
-                <a:solidFill>
-                  <a:srgbClr val="94A3B8"/>
-                </a:solidFill>
-              </a:rPr>
-              <a:t>Prepared by: Intern / Data Analyst — Bluestock Fintech</a:t>
+                <a:latin typeface="Times New Roman" panose="02020603050405020304" pitchFamily="18" charset="0"/>
+                <a:cs typeface="Times New Roman" panose="02020603050405020304" pitchFamily="18" charset="0"/>
+              </a:rPr>
+              <a:t> Fintech</a:t>
             </a:r>
           </a:p>
         </p:txBody>
@@ -3859,7 +3548,7 @@
 </file>
 
 <file path=ppt/slides/slide10.xml><?xml version="1.0" encoding="utf-8"?>
-<p:sld xmlns:a="http://schemas.openxmlformats.org/drawingml/2006/main" xmlns:p="http://schemas.openxmlformats.org/presentationml/2006/main" xmlns:r="http://schemas.openxmlformats.org/officeDocument/2006/relationships">
+<p:sld xmlns:a="http://schemas.openxmlformats.org/drawingml/2006/main" xmlns:r="http://schemas.openxmlformats.org/officeDocument/2006/relationships" xmlns:p="http://schemas.openxmlformats.org/presentationml/2006/main">
   <p:cSld>
     <p:spTree>
       <p:nvGrpSpPr>
@@ -3867,7 +3556,14 @@
         <p:cNvGrpSpPr/>
         <p:nvPr/>
       </p:nvGrpSpPr>
-      <p:grpSpPr/>
+      <p:grpSpPr>
+        <a:xfrm>
+          <a:off x="0" y="0"/>
+          <a:ext cx="0" cy="0"/>
+          <a:chOff x="0" y="0"/>
+          <a:chExt cx="0" cy="0"/>
+        </a:xfrm>
+      </p:grpSpPr>
       <p:sp>
         <p:nvSpPr>
           <p:cNvPr id="2" name="Rectangle 1"/>
@@ -3908,6 +3604,7 @@
           <a:lstStyle/>
           <a:p>
             <a:pPr algn="ctr"/>
+            <a:endParaRPr/>
           </a:p>
         </p:txBody>
       </p:sp>
@@ -3951,6 +3648,7 @@
           <a:lstStyle/>
           <a:p>
             <a:pPr algn="ctr"/>
+            <a:endParaRPr/>
           </a:p>
         </p:txBody>
       </p:sp>
@@ -4078,6 +3776,7 @@
           <a:lstStyle/>
           <a:p>
             <a:pPr algn="ctr"/>
+            <a:endParaRPr/>
           </a:p>
         </p:txBody>
       </p:sp>
@@ -4259,6 +3958,7 @@
           <a:lstStyle/>
           <a:p>
             <a:pPr algn="ctr"/>
+            <a:endParaRPr/>
           </a:p>
         </p:txBody>
       </p:sp>
@@ -4438,6 +4138,7 @@
           <a:lstStyle/>
           <a:p>
             <a:pPr algn="ctr"/>
+            <a:endParaRPr/>
           </a:p>
         </p:txBody>
       </p:sp>
@@ -4518,7 +4219,7 @@
 </file>
 
 <file path=ppt/slides/slide11.xml><?xml version="1.0" encoding="utf-8"?>
-<p:sld xmlns:a="http://schemas.openxmlformats.org/drawingml/2006/main" xmlns:p="http://schemas.openxmlformats.org/presentationml/2006/main" xmlns:r="http://schemas.openxmlformats.org/officeDocument/2006/relationships">
+<p:sld xmlns:a="http://schemas.openxmlformats.org/drawingml/2006/main" xmlns:r="http://schemas.openxmlformats.org/officeDocument/2006/relationships" xmlns:p="http://schemas.openxmlformats.org/presentationml/2006/main">
   <p:cSld>
     <p:spTree>
       <p:nvGrpSpPr>
@@ -4526,7 +4227,14 @@
         <p:cNvGrpSpPr/>
         <p:nvPr/>
       </p:nvGrpSpPr>
-      <p:grpSpPr/>
+      <p:grpSpPr>
+        <a:xfrm>
+          <a:off x="0" y="0"/>
+          <a:ext cx="0" cy="0"/>
+          <a:chOff x="0" y="0"/>
+          <a:chExt cx="0" cy="0"/>
+        </a:xfrm>
+      </p:grpSpPr>
       <p:sp>
         <p:nvSpPr>
           <p:cNvPr id="2" name="Rectangle 1"/>
@@ -4567,6 +4275,7 @@
           <a:lstStyle/>
           <a:p>
             <a:pPr algn="ctr"/>
+            <a:endParaRPr/>
           </a:p>
         </p:txBody>
       </p:sp>
@@ -4610,6 +4319,7 @@
           <a:lstStyle/>
           <a:p>
             <a:pPr algn="ctr"/>
+            <a:endParaRPr/>
           </a:p>
         </p:txBody>
       </p:sp>
@@ -4689,6 +4399,7 @@
           <a:lstStyle/>
           <a:p>
             <a:pPr algn="ctr"/>
+            <a:endParaRPr/>
           </a:p>
         </p:txBody>
       </p:sp>
@@ -4802,6 +4513,7 @@
           <a:lstStyle/>
           <a:p>
             <a:pPr algn="ctr"/>
+            <a:endParaRPr/>
           </a:p>
         </p:txBody>
       </p:sp>
@@ -4915,6 +4627,7 @@
           <a:lstStyle/>
           <a:p>
             <a:pPr algn="ctr"/>
+            <a:endParaRPr/>
           </a:p>
         </p:txBody>
       </p:sp>
@@ -5028,6 +4741,7 @@
           <a:lstStyle/>
           <a:p>
             <a:pPr algn="ctr"/>
+            <a:endParaRPr/>
           </a:p>
         </p:txBody>
       </p:sp>
@@ -5141,6 +4855,7 @@
           <a:lstStyle/>
           <a:p>
             <a:pPr algn="ctr"/>
+            <a:endParaRPr/>
           </a:p>
         </p:txBody>
       </p:sp>
@@ -5254,6 +4969,7 @@
           <a:lstStyle/>
           <a:p>
             <a:pPr algn="ctr"/>
+            <a:endParaRPr/>
           </a:p>
         </p:txBody>
       </p:sp>
@@ -5367,6 +5083,7 @@
           <a:lstStyle/>
           <a:p>
             <a:pPr algn="ctr"/>
+            <a:endParaRPr/>
           </a:p>
         </p:txBody>
       </p:sp>
@@ -5480,6 +5197,7 @@
           <a:lstStyle/>
           <a:p>
             <a:pPr algn="ctr"/>
+            <a:endParaRPr/>
           </a:p>
         </p:txBody>
       </p:sp>
@@ -5591,6 +5309,7 @@
           <a:lstStyle/>
           <a:p>
             <a:pPr algn="ctr"/>
+            <a:endParaRPr/>
           </a:p>
         </p:txBody>
       </p:sp>
@@ -5671,7 +5390,7 @@
 </file>
 
 <file path=ppt/slides/slide12.xml><?xml version="1.0" encoding="utf-8"?>
-<p:sld xmlns:a="http://schemas.openxmlformats.org/drawingml/2006/main" xmlns:p="http://schemas.openxmlformats.org/presentationml/2006/main" xmlns:r="http://schemas.openxmlformats.org/officeDocument/2006/relationships">
+<p:sld xmlns:a="http://schemas.openxmlformats.org/drawingml/2006/main" xmlns:r="http://schemas.openxmlformats.org/officeDocument/2006/relationships" xmlns:p="http://schemas.openxmlformats.org/presentationml/2006/main">
   <p:cSld>
     <p:spTree>
       <p:nvGrpSpPr>
@@ -5679,180 +5398,78 @@
         <p:cNvGrpSpPr/>
         <p:nvPr/>
       </p:nvGrpSpPr>
-      <p:grpSpPr/>
-      <p:sp>
-        <p:nvSpPr>
-          <p:cNvPr id="2" name="Rectangle 1"/>
-          <p:cNvSpPr/>
-          <p:nvPr/>
-        </p:nvSpPr>
-        <p:spPr>
-          <a:xfrm>
-            <a:off x="0" y="0"/>
-            <a:ext cx="12188952" cy="6858000"/>
-          </a:xfrm>
-          <a:prstGeom prst="rect">
-            <a:avLst/>
-          </a:prstGeom>
-          <a:solidFill>
-            <a:srgbClr val="0D2137"/>
-          </a:solidFill>
-          <a:ln>
-            <a:noFill/>
-          </a:ln>
-        </p:spPr>
-        <p:style>
-          <a:lnRef idx="1">
-            <a:schemeClr val="accent1"/>
-          </a:lnRef>
-          <a:fillRef idx="3">
-            <a:schemeClr val="accent1"/>
-          </a:fillRef>
-          <a:effectRef idx="2">
-            <a:schemeClr val="accent1"/>
-          </a:effectRef>
-          <a:fontRef idx="minor">
-            <a:schemeClr val="lt1"/>
-          </a:fontRef>
-        </p:style>
-        <p:txBody>
-          <a:bodyPr rtlCol="0" anchor="ctr"/>
+      <p:grpSpPr>
+        <a:xfrm>
+          <a:off x="0" y="0"/>
+          <a:ext cx="0" cy="0"/>
+          <a:chOff x="0" y="0"/>
+          <a:chExt cx="0" cy="0"/>
+        </a:xfrm>
+      </p:grpSpPr>
+      <p:sp>
+        <p:nvSpPr>
+          <p:cNvPr id="5" name="TextBox 4"/>
+          <p:cNvSpPr txBox="1"/>
+          <p:nvPr/>
+        </p:nvSpPr>
+        <p:spPr>
+          <a:xfrm>
+            <a:off x="104517" y="674001"/>
+            <a:ext cx="12188952" cy="3046988"/>
+          </a:xfrm>
+          <a:prstGeom prst="rect">
+            <a:avLst/>
+          </a:prstGeom>
+          <a:noFill/>
+        </p:spPr>
+        <p:txBody>
+          <a:bodyPr wrap="square">
+            <a:spAutoFit/>
+          </a:bodyPr>
           <a:lstStyle/>
           <a:p>
             <a:pPr algn="ctr"/>
-          </a:p>
-        </p:txBody>
-      </p:sp>
-      <p:sp>
-        <p:nvSpPr>
-          <p:cNvPr id="3" name="Rectangle 2"/>
-          <p:cNvSpPr/>
-          <p:nvPr/>
-        </p:nvSpPr>
-        <p:spPr>
-          <a:xfrm>
-            <a:off x="0" y="2834640"/>
-            <a:ext cx="12188952" cy="64008"/>
-          </a:xfrm>
-          <a:prstGeom prst="rect">
-            <a:avLst/>
-          </a:prstGeom>
-          <a:solidFill>
-            <a:srgbClr val="1565C0"/>
-          </a:solidFill>
-          <a:ln>
-            <a:noFill/>
-          </a:ln>
-        </p:spPr>
-        <p:style>
-          <a:lnRef idx="1">
-            <a:schemeClr val="accent1"/>
-          </a:lnRef>
-          <a:fillRef idx="3">
-            <a:schemeClr val="accent1"/>
-          </a:fillRef>
-          <a:effectRef idx="2">
-            <a:schemeClr val="accent1"/>
-          </a:effectRef>
-          <a:fontRef idx="minor">
-            <a:schemeClr val="lt1"/>
-          </a:fontRef>
-        </p:style>
-        <p:txBody>
-          <a:bodyPr rtlCol="0" anchor="ctr"/>
-          <a:lstStyle/>
+            <a:endParaRPr lang="en-US" sz="4800" b="1" dirty="0"/>
+          </a:p>
           <a:p>
             <a:pPr algn="ctr"/>
-          </a:p>
-        </p:txBody>
-      </p:sp>
-      <p:sp>
-        <p:nvSpPr>
-          <p:cNvPr id="4" name="Rectangle 3"/>
-          <p:cNvSpPr/>
-          <p:nvPr/>
-        </p:nvSpPr>
-        <p:spPr>
-          <a:xfrm>
-            <a:off x="0" y="3931920"/>
-            <a:ext cx="12188952" cy="64008"/>
-          </a:xfrm>
-          <a:prstGeom prst="rect">
-            <a:avLst/>
-          </a:prstGeom>
-          <a:solidFill>
-            <a:srgbClr val="00897B"/>
-          </a:solidFill>
-          <a:ln>
-            <a:noFill/>
-          </a:ln>
-        </p:spPr>
-        <p:style>
-          <a:lnRef idx="1">
-            <a:schemeClr val="accent1"/>
-          </a:lnRef>
-          <a:fillRef idx="3">
-            <a:schemeClr val="accent1"/>
-          </a:fillRef>
-          <a:effectRef idx="2">
-            <a:schemeClr val="accent1"/>
-          </a:effectRef>
-          <a:fontRef idx="minor">
-            <a:schemeClr val="lt1"/>
-          </a:fontRef>
-        </p:style>
-        <p:txBody>
-          <a:bodyPr rtlCol="0" anchor="ctr"/>
-          <a:lstStyle/>
+            <a:endParaRPr lang="en-US" sz="4800" b="1" dirty="0"/>
+          </a:p>
           <a:p>
             <a:pPr algn="ctr"/>
-          </a:p>
-        </p:txBody>
-      </p:sp>
-      <p:sp>
-        <p:nvSpPr>
-          <p:cNvPr id="5" name="TextBox 4"/>
-          <p:cNvSpPr txBox="1"/>
-          <p:nvPr/>
-        </p:nvSpPr>
-        <p:spPr>
-          <a:xfrm>
-            <a:off x="0" y="594360"/>
-            <a:ext cx="12188952" cy="1005840"/>
-          </a:xfrm>
-          <a:prstGeom prst="rect">
-            <a:avLst/>
-          </a:prstGeom>
-          <a:noFill/>
-        </p:spPr>
-        <p:txBody>
-          <a:bodyPr wrap="square">
-            <a:spAutoFit/>
-          </a:bodyPr>
-          <a:lstStyle/>
+            <a:endParaRPr lang="en-US" sz="4800" b="1" dirty="0"/>
+          </a:p>
           <a:p>
             <a:pPr algn="ctr"/>
             <a:r>
-              <a:rPr sz="4800" b="1">
+              <a:rPr sz="4800" b="1" dirty="0"/>
+              <a:t>Thank</a:t>
+            </a:r>
+            <a:r>
+              <a:rPr sz="4800" b="1" dirty="0">
                 <a:solidFill>
                   <a:srgbClr val="FFFFFF"/>
                 </a:solidFill>
               </a:rPr>
-              <a:t>Thank You</a:t>
-            </a:r>
-          </a:p>
-        </p:txBody>
-      </p:sp>
-      <p:sp>
-        <p:nvSpPr>
-          <p:cNvPr id="6" name="TextBox 5"/>
-          <p:cNvSpPr txBox="1"/>
-          <p:nvPr/>
-        </p:nvSpPr>
-        <p:spPr>
-          <a:xfrm>
-            <a:off x="0" y="1691640"/>
-            <a:ext cx="12188952" cy="502920"/>
+              <a:t> </a:t>
+            </a:r>
+            <a:r>
+              <a:rPr sz="4800" b="1" dirty="0"/>
+              <a:t>You</a:t>
+            </a:r>
+          </a:p>
+        </p:txBody>
+      </p:sp>
+      <p:sp>
+        <p:nvSpPr>
+          <p:cNvPr id="29" name="TextBox 28"/>
+          <p:cNvSpPr txBox="1"/>
+          <p:nvPr/>
+        </p:nvSpPr>
+        <p:spPr>
+          <a:xfrm>
+            <a:off x="0" y="6510528"/>
+            <a:ext cx="12188952" cy="223138"/>
           </a:xfrm>
           <a:prstGeom prst="rect">
             <a:avLst/>
@@ -5867,839 +5484,28 @@
           <a:p>
             <a:pPr algn="ctr"/>
             <a:r>
-              <a:rPr sz="1800" b="0">
-                <a:solidFill>
-                  <a:srgbClr val="B0C4DE"/>
-                </a:solidFill>
-              </a:rPr>
-              <a:t>Bluestock Fintech  |  Mutual Fund Analytics Platform</a:t>
-            </a:r>
-          </a:p>
-        </p:txBody>
-      </p:sp>
-      <p:sp>
-        <p:nvSpPr>
-          <p:cNvPr id="7" name="TextBox 6"/>
-          <p:cNvSpPr txBox="1"/>
-          <p:nvPr/>
-        </p:nvSpPr>
-        <p:spPr>
-          <a:xfrm>
-            <a:off x="0" y="2267712"/>
-            <a:ext cx="12188952" cy="411480"/>
-          </a:xfrm>
-          <a:prstGeom prst="rect">
-            <a:avLst/>
-          </a:prstGeom>
-          <a:noFill/>
-        </p:spPr>
-        <p:txBody>
-          <a:bodyPr wrap="square">
-            <a:spAutoFit/>
-          </a:bodyPr>
-          <a:lstStyle/>
-          <a:p>
-            <a:pPr algn="ctr"/>
-            <a:r>
-              <a:rPr sz="1200" b="0">
+              <a:rPr sz="850" b="0" dirty="0">
                 <a:solidFill>
                   <a:srgbClr val="94A3B8"/>
                 </a:solidFill>
               </a:rPr>
-              <a:t>Capstone Project  |  June 2026</a:t>
-            </a:r>
-          </a:p>
-        </p:txBody>
-      </p:sp>
-      <p:sp>
-        <p:nvSpPr>
-          <p:cNvPr id="8" name="Rectangle 7"/>
-          <p:cNvSpPr/>
-          <p:nvPr/>
-        </p:nvSpPr>
-        <p:spPr>
-          <a:xfrm>
-            <a:off x="1737360" y="3108960"/>
-            <a:ext cx="2697480" cy="1280160"/>
-          </a:xfrm>
-          <a:prstGeom prst="rect">
-            <a:avLst/>
-          </a:prstGeom>
-          <a:solidFill>
-            <a:srgbClr val="1A2B3C"/>
-          </a:solidFill>
-          <a:ln w="9525">
-            <a:solidFill>
-              <a:srgbClr val="1565C0"/>
-            </a:solidFill>
-          </a:ln>
-        </p:spPr>
-        <p:style>
-          <a:lnRef idx="1">
-            <a:schemeClr val="accent1"/>
-          </a:lnRef>
-          <a:fillRef idx="3">
-            <a:schemeClr val="accent1"/>
-          </a:fillRef>
-          <a:effectRef idx="2">
-            <a:schemeClr val="accent1"/>
-          </a:effectRef>
-          <a:fontRef idx="minor">
-            <a:schemeClr val="lt1"/>
-          </a:fontRef>
-        </p:style>
-        <p:txBody>
-          <a:bodyPr rtlCol="0" anchor="ctr"/>
-          <a:lstStyle/>
-          <a:p>
-            <a:pPr algn="ctr"/>
-          </a:p>
-        </p:txBody>
-      </p:sp>
-      <p:sp>
-        <p:nvSpPr>
-          <p:cNvPr id="9" name="TextBox 8"/>
-          <p:cNvSpPr txBox="1"/>
-          <p:nvPr/>
-        </p:nvSpPr>
-        <p:spPr>
-          <a:xfrm>
-            <a:off x="1737360" y="3172968"/>
-            <a:ext cx="2697480" cy="384048"/>
-          </a:xfrm>
-          <a:prstGeom prst="rect">
-            <a:avLst/>
-          </a:prstGeom>
-          <a:noFill/>
-        </p:spPr>
-        <p:txBody>
-          <a:bodyPr wrap="square">
-            <a:spAutoFit/>
-          </a:bodyPr>
-          <a:lstStyle/>
-          <a:p>
-            <a:pPr algn="ctr"/>
-            <a:r>
-              <a:rPr sz="1100" b="1">
-                <a:solidFill>
-                  <a:srgbClr val="1565C0"/>
-                </a:solidFill>
-              </a:rPr>
-              <a:t>📂 GitHub</a:t>
-            </a:r>
-          </a:p>
-        </p:txBody>
-      </p:sp>
-      <p:sp>
-        <p:nvSpPr>
-          <p:cNvPr id="10" name="TextBox 9"/>
-          <p:cNvSpPr txBox="1"/>
-          <p:nvPr/>
-        </p:nvSpPr>
-        <p:spPr>
-          <a:xfrm>
-            <a:off x="1737360" y="3584448"/>
-            <a:ext cx="2697480" cy="731520"/>
-          </a:xfrm>
-          <a:prstGeom prst="rect">
-            <a:avLst/>
-          </a:prstGeom>
-          <a:noFill/>
-        </p:spPr>
-        <p:txBody>
-          <a:bodyPr wrap="square">
-            <a:spAutoFit/>
-          </a:bodyPr>
-          <a:lstStyle/>
-          <a:p>
-            <a:pPr algn="ctr"/>
-            <a:r>
-              <a:rPr sz="850" b="0">
+              <a:t>Prepared by: Intern / Data Analyst — </a:t>
+            </a:r>
+            <a:r>
+              <a:rPr sz="850" b="0" dirty="0" err="1">
                 <a:solidFill>
                   <a:srgbClr val="94A3B8"/>
                 </a:solidFill>
               </a:rPr>
-              <a:t>github.com/[username]/
-bluestock-mf-capstone</a:t>
-            </a:r>
-          </a:p>
-        </p:txBody>
-      </p:sp>
-      <p:sp>
-        <p:nvSpPr>
-          <p:cNvPr id="11" name="Rectangle 10"/>
-          <p:cNvSpPr/>
-          <p:nvPr/>
-        </p:nvSpPr>
-        <p:spPr>
-          <a:xfrm>
-            <a:off x="4663440" y="3108960"/>
-            <a:ext cx="2697480" cy="1280160"/>
-          </a:xfrm>
-          <a:prstGeom prst="rect">
-            <a:avLst/>
-          </a:prstGeom>
-          <a:solidFill>
-            <a:srgbClr val="1A2B3C"/>
-          </a:solidFill>
-          <a:ln w="9525">
-            <a:solidFill>
-              <a:srgbClr val="1565C0"/>
-            </a:solidFill>
-          </a:ln>
-        </p:spPr>
-        <p:style>
-          <a:lnRef idx="1">
-            <a:schemeClr val="accent1"/>
-          </a:lnRef>
-          <a:fillRef idx="3">
-            <a:schemeClr val="accent1"/>
-          </a:fillRef>
-          <a:effectRef idx="2">
-            <a:schemeClr val="accent1"/>
-          </a:effectRef>
-          <a:fontRef idx="minor">
-            <a:schemeClr val="lt1"/>
-          </a:fontRef>
-        </p:style>
-        <p:txBody>
-          <a:bodyPr rtlCol="0" anchor="ctr"/>
-          <a:lstStyle/>
-          <a:p>
-            <a:pPr algn="ctr"/>
-          </a:p>
-        </p:txBody>
-      </p:sp>
-      <p:sp>
-        <p:nvSpPr>
-          <p:cNvPr id="12" name="TextBox 11"/>
-          <p:cNvSpPr txBox="1"/>
-          <p:nvPr/>
-        </p:nvSpPr>
-        <p:spPr>
-          <a:xfrm>
-            <a:off x="4663440" y="3172968"/>
-            <a:ext cx="2697480" cy="384048"/>
-          </a:xfrm>
-          <a:prstGeom prst="rect">
-            <a:avLst/>
-          </a:prstGeom>
-          <a:noFill/>
-        </p:spPr>
-        <p:txBody>
-          <a:bodyPr wrap="square">
-            <a:spAutoFit/>
-          </a:bodyPr>
-          <a:lstStyle/>
-          <a:p>
-            <a:pPr algn="ctr"/>
-            <a:r>
-              <a:rPr sz="1100" b="1">
-                <a:solidFill>
-                  <a:srgbClr val="1565C0"/>
-                </a:solidFill>
-              </a:rPr>
-              <a:t>🚀 Dashboard</a:t>
-            </a:r>
-          </a:p>
-        </p:txBody>
-      </p:sp>
-      <p:sp>
-        <p:nvSpPr>
-          <p:cNvPr id="13" name="TextBox 12"/>
-          <p:cNvSpPr txBox="1"/>
-          <p:nvPr/>
-        </p:nvSpPr>
-        <p:spPr>
-          <a:xfrm>
-            <a:off x="4663440" y="3584448"/>
-            <a:ext cx="2697480" cy="731520"/>
-          </a:xfrm>
-          <a:prstGeom prst="rect">
-            <a:avLst/>
-          </a:prstGeom>
-          <a:noFill/>
-        </p:spPr>
-        <p:txBody>
-          <a:bodyPr wrap="square">
-            <a:spAutoFit/>
-          </a:bodyPr>
-          <a:lstStyle/>
-          <a:p>
-            <a:pPr algn="ctr"/>
-            <a:r>
-              <a:rPr sz="850" b="0">
+              <a:t>Bluestock</a:t>
+            </a:r>
+            <a:r>
+              <a:rPr sz="850" b="0" dirty="0">
                 <a:solidFill>
                   <a:srgbClr val="94A3B8"/>
                 </a:solidFill>
               </a:rPr>
-              <a:t>streamlit run dashboard/app.py
-localhost:8501</a:t>
-            </a:r>
-          </a:p>
-        </p:txBody>
-      </p:sp>
-      <p:sp>
-        <p:nvSpPr>
-          <p:cNvPr id="14" name="Rectangle 13"/>
-          <p:cNvSpPr/>
-          <p:nvPr/>
-        </p:nvSpPr>
-        <p:spPr>
-          <a:xfrm>
-            <a:off x="7589520" y="3108960"/>
-            <a:ext cx="2697480" cy="1280160"/>
-          </a:xfrm>
-          <a:prstGeom prst="rect">
-            <a:avLst/>
-          </a:prstGeom>
-          <a:solidFill>
-            <a:srgbClr val="1A2B3C"/>
-          </a:solidFill>
-          <a:ln w="9525">
-            <a:solidFill>
-              <a:srgbClr val="1565C0"/>
-            </a:solidFill>
-          </a:ln>
-        </p:spPr>
-        <p:style>
-          <a:lnRef idx="1">
-            <a:schemeClr val="accent1"/>
-          </a:lnRef>
-          <a:fillRef idx="3">
-            <a:schemeClr val="accent1"/>
-          </a:fillRef>
-          <a:effectRef idx="2">
-            <a:schemeClr val="accent1"/>
-          </a:effectRef>
-          <a:fontRef idx="minor">
-            <a:schemeClr val="lt1"/>
-          </a:fontRef>
-        </p:style>
-        <p:txBody>
-          <a:bodyPr rtlCol="0" anchor="ctr"/>
-          <a:lstStyle/>
-          <a:p>
-            <a:pPr algn="ctr"/>
-          </a:p>
-        </p:txBody>
-      </p:sp>
-      <p:sp>
-        <p:nvSpPr>
-          <p:cNvPr id="15" name="TextBox 14"/>
-          <p:cNvSpPr txBox="1"/>
-          <p:nvPr/>
-        </p:nvSpPr>
-        <p:spPr>
-          <a:xfrm>
-            <a:off x="7589520" y="3172968"/>
-            <a:ext cx="2697480" cy="384048"/>
-          </a:xfrm>
-          <a:prstGeom prst="rect">
-            <a:avLst/>
-          </a:prstGeom>
-          <a:noFill/>
-        </p:spPr>
-        <p:txBody>
-          <a:bodyPr wrap="square">
-            <a:spAutoFit/>
-          </a:bodyPr>
-          <a:lstStyle/>
-          <a:p>
-            <a:pPr algn="ctr"/>
-            <a:r>
-              <a:rPr sz="1100" b="1">
-                <a:solidFill>
-                  <a:srgbClr val="1565C0"/>
-                </a:solidFill>
-              </a:rPr>
-              <a:t>📊 Data Source</a:t>
-            </a:r>
-          </a:p>
-        </p:txBody>
-      </p:sp>
-      <p:sp>
-        <p:nvSpPr>
-          <p:cNvPr id="16" name="TextBox 15"/>
-          <p:cNvSpPr txBox="1"/>
-          <p:nvPr/>
-        </p:nvSpPr>
-        <p:spPr>
-          <a:xfrm>
-            <a:off x="7589520" y="3584448"/>
-            <a:ext cx="2697480" cy="731520"/>
-          </a:xfrm>
-          <a:prstGeom prst="rect">
-            <a:avLst/>
-          </a:prstGeom>
-          <a:noFill/>
-        </p:spPr>
-        <p:txBody>
-          <a:bodyPr wrap="square">
-            <a:spAutoFit/>
-          </a:bodyPr>
-          <a:lstStyle/>
-          <a:p>
-            <a:pPr algn="ctr"/>
-            <a:r>
-              <a:rPr sz="850" b="0">
-                <a:solidFill>
-                  <a:srgbClr val="94A3B8"/>
-                </a:solidFill>
-              </a:rPr>
-              <a:t>amfiindia.com · mfapi.in
-nseindia.com</a:t>
-            </a:r>
-          </a:p>
-        </p:txBody>
-      </p:sp>
-      <p:sp>
-        <p:nvSpPr>
-          <p:cNvPr id="17" name="Rectangle 16"/>
-          <p:cNvSpPr/>
-          <p:nvPr/>
-        </p:nvSpPr>
-        <p:spPr>
-          <a:xfrm>
-            <a:off x="365760" y="4617720"/>
-            <a:ext cx="11430000" cy="1783080"/>
-          </a:xfrm>
-          <a:prstGeom prst="rect">
-            <a:avLst/>
-          </a:prstGeom>
-          <a:solidFill>
-            <a:srgbClr val="1A2B3C"/>
-          </a:solidFill>
-          <a:ln>
-            <a:noFill/>
-          </a:ln>
-        </p:spPr>
-        <p:style>
-          <a:lnRef idx="1">
-            <a:schemeClr val="accent1"/>
-          </a:lnRef>
-          <a:fillRef idx="3">
-            <a:schemeClr val="accent1"/>
-          </a:fillRef>
-          <a:effectRef idx="2">
-            <a:schemeClr val="accent1"/>
-          </a:effectRef>
-          <a:fontRef idx="minor">
-            <a:schemeClr val="lt1"/>
-          </a:fontRef>
-        </p:style>
-        <p:txBody>
-          <a:bodyPr rtlCol="0" anchor="ctr"/>
-          <a:lstStyle/>
-          <a:p>
-            <a:pPr algn="ctr"/>
-          </a:p>
-        </p:txBody>
-      </p:sp>
-      <p:sp>
-        <p:nvSpPr>
-          <p:cNvPr id="18" name="TextBox 17"/>
-          <p:cNvSpPr txBox="1"/>
-          <p:nvPr/>
-        </p:nvSpPr>
-        <p:spPr>
-          <a:xfrm>
-            <a:off x="365760" y="4663440"/>
-            <a:ext cx="11430000" cy="347472"/>
-          </a:xfrm>
-          <a:prstGeom prst="rect">
-            <a:avLst/>
-          </a:prstGeom>
-          <a:noFill/>
-        </p:spPr>
-        <p:txBody>
-          <a:bodyPr wrap="square">
-            <a:spAutoFit/>
-          </a:bodyPr>
-          <a:lstStyle/>
-          <a:p>
-            <a:pPr algn="ctr"/>
-            <a:r>
-              <a:rPr sz="1200" b="1">
-                <a:solidFill>
-                  <a:srgbClr val="FFFFFF"/>
-                </a:solidFill>
-              </a:rPr>
-              <a:t>All 7 Deliverables + 4 Bonus Challenges Completed</a:t>
-            </a:r>
-          </a:p>
-        </p:txBody>
-      </p:sp>
-      <p:sp>
-        <p:nvSpPr>
-          <p:cNvPr id="19" name="TextBox 18"/>
-          <p:cNvSpPr txBox="1"/>
-          <p:nvPr/>
-        </p:nvSpPr>
-        <p:spPr>
-          <a:xfrm>
-            <a:off x="502920" y="5074920"/>
-            <a:ext cx="2148840" cy="365760"/>
-          </a:xfrm>
-          <a:prstGeom prst="rect">
-            <a:avLst/>
-          </a:prstGeom>
-          <a:noFill/>
-        </p:spPr>
-        <p:txBody>
-          <a:bodyPr wrap="square">
-            <a:spAutoFit/>
-          </a:bodyPr>
-          <a:lstStyle/>
-          <a:p>
-            <a:pPr algn="l"/>
-            <a:r>
-              <a:rPr sz="900" b="0">
-                <a:solidFill>
-                  <a:srgbClr val="FFFFFF"/>
-                </a:solidFill>
-              </a:rPr>
-              <a:t>✅ D1 ETL Pipeline</a:t>
-            </a:r>
-          </a:p>
-        </p:txBody>
-      </p:sp>
-      <p:sp>
-        <p:nvSpPr>
-          <p:cNvPr id="20" name="TextBox 19"/>
-          <p:cNvSpPr txBox="1"/>
-          <p:nvPr/>
-        </p:nvSpPr>
-        <p:spPr>
-          <a:xfrm>
-            <a:off x="2743200" y="5074920"/>
-            <a:ext cx="2148840" cy="365760"/>
-          </a:xfrm>
-          <a:prstGeom prst="rect">
-            <a:avLst/>
-          </a:prstGeom>
-          <a:noFill/>
-        </p:spPr>
-        <p:txBody>
-          <a:bodyPr wrap="square">
-            <a:spAutoFit/>
-          </a:bodyPr>
-          <a:lstStyle/>
-          <a:p>
-            <a:pPr algn="l"/>
-            <a:r>
-              <a:rPr sz="900" b="0">
-                <a:solidFill>
-                  <a:srgbClr val="FFFFFF"/>
-                </a:solidFill>
-              </a:rPr>
-              <a:t>✅ D2 SQLite DB</a:t>
-            </a:r>
-          </a:p>
-        </p:txBody>
-      </p:sp>
-      <p:sp>
-        <p:nvSpPr>
-          <p:cNvPr id="21" name="TextBox 20"/>
-          <p:cNvSpPr txBox="1"/>
-          <p:nvPr/>
-        </p:nvSpPr>
-        <p:spPr>
-          <a:xfrm>
-            <a:off x="4983480" y="5074920"/>
-            <a:ext cx="2148840" cy="365760"/>
-          </a:xfrm>
-          <a:prstGeom prst="rect">
-            <a:avLst/>
-          </a:prstGeom>
-          <a:noFill/>
-        </p:spPr>
-        <p:txBody>
-          <a:bodyPr wrap="square">
-            <a:spAutoFit/>
-          </a:bodyPr>
-          <a:lstStyle/>
-          <a:p>
-            <a:pPr algn="l"/>
-            <a:r>
-              <a:rPr sz="900" b="0">
-                <a:solidFill>
-                  <a:srgbClr val="FFFFFF"/>
-                </a:solidFill>
-              </a:rPr>
-              <a:t>✅ D3 EDA Notebook</a:t>
-            </a:r>
-          </a:p>
-        </p:txBody>
-      </p:sp>
-      <p:sp>
-        <p:nvSpPr>
-          <p:cNvPr id="22" name="TextBox 21"/>
-          <p:cNvSpPr txBox="1"/>
-          <p:nvPr/>
-        </p:nvSpPr>
-        <p:spPr>
-          <a:xfrm>
-            <a:off x="7223760" y="5074920"/>
-            <a:ext cx="2148840" cy="365760"/>
-          </a:xfrm>
-          <a:prstGeom prst="rect">
-            <a:avLst/>
-          </a:prstGeom>
-          <a:noFill/>
-        </p:spPr>
-        <p:txBody>
-          <a:bodyPr wrap="square">
-            <a:spAutoFit/>
-          </a:bodyPr>
-          <a:lstStyle/>
-          <a:p>
-            <a:pPr algn="l"/>
-            <a:r>
-              <a:rPr sz="900" b="0">
-                <a:solidFill>
-                  <a:srgbClr val="FFFFFF"/>
-                </a:solidFill>
-              </a:rPr>
-              <a:t>✅ D4 Perf. Metrics</a:t>
-            </a:r>
-          </a:p>
-        </p:txBody>
-      </p:sp>
-      <p:sp>
-        <p:nvSpPr>
-          <p:cNvPr id="23" name="TextBox 22"/>
-          <p:cNvSpPr txBox="1"/>
-          <p:nvPr/>
-        </p:nvSpPr>
-        <p:spPr>
-          <a:xfrm>
-            <a:off x="9464040" y="5074920"/>
-            <a:ext cx="2148840" cy="365760"/>
-          </a:xfrm>
-          <a:prstGeom prst="rect">
-            <a:avLst/>
-          </a:prstGeom>
-          <a:noFill/>
-        </p:spPr>
-        <p:txBody>
-          <a:bodyPr wrap="square">
-            <a:spAutoFit/>
-          </a:bodyPr>
-          <a:lstStyle/>
-          <a:p>
-            <a:pPr algn="l"/>
-            <a:r>
-              <a:rPr sz="900" b="0">
-                <a:solidFill>
-                  <a:srgbClr val="FFFFFF"/>
-                </a:solidFill>
-              </a:rPr>
-              <a:t>✅ D5 Dashboard</a:t>
-            </a:r>
-          </a:p>
-        </p:txBody>
-      </p:sp>
-      <p:sp>
-        <p:nvSpPr>
-          <p:cNvPr id="24" name="TextBox 23"/>
-          <p:cNvSpPr txBox="1"/>
-          <p:nvPr/>
-        </p:nvSpPr>
-        <p:spPr>
-          <a:xfrm>
-            <a:off x="502920" y="5513831"/>
-            <a:ext cx="2148840" cy="365760"/>
-          </a:xfrm>
-          <a:prstGeom prst="rect">
-            <a:avLst/>
-          </a:prstGeom>
-          <a:noFill/>
-        </p:spPr>
-        <p:txBody>
-          <a:bodyPr wrap="square">
-            <a:spAutoFit/>
-          </a:bodyPr>
-          <a:lstStyle/>
-          <a:p>
-            <a:pPr algn="l"/>
-            <a:r>
-              <a:rPr sz="900" b="0">
-                <a:solidFill>
-                  <a:srgbClr val="FFFFFF"/>
-                </a:solidFill>
-              </a:rPr>
-              <a:t>✅ D6 Adv. Analytics</a:t>
-            </a:r>
-          </a:p>
-        </p:txBody>
-      </p:sp>
-      <p:sp>
-        <p:nvSpPr>
-          <p:cNvPr id="25" name="TextBox 24"/>
-          <p:cNvSpPr txBox="1"/>
-          <p:nvPr/>
-        </p:nvSpPr>
-        <p:spPr>
-          <a:xfrm>
-            <a:off x="2743200" y="5513831"/>
-            <a:ext cx="2148840" cy="365760"/>
-          </a:xfrm>
-          <a:prstGeom prst="rect">
-            <a:avLst/>
-          </a:prstGeom>
-          <a:noFill/>
-        </p:spPr>
-        <p:txBody>
-          <a:bodyPr wrap="square">
-            <a:spAutoFit/>
-          </a:bodyPr>
-          <a:lstStyle/>
-          <a:p>
-            <a:pPr algn="l"/>
-            <a:r>
-              <a:rPr sz="900" b="0">
-                <a:solidFill>
-                  <a:srgbClr val="FFFFFF"/>
-                </a:solidFill>
-              </a:rPr>
-              <a:t>✅ D7 Report+Slides</a:t>
-            </a:r>
-          </a:p>
-        </p:txBody>
-      </p:sp>
-      <p:sp>
-        <p:nvSpPr>
-          <p:cNvPr id="26" name="TextBox 25"/>
-          <p:cNvSpPr txBox="1"/>
-          <p:nvPr/>
-        </p:nvSpPr>
-        <p:spPr>
-          <a:xfrm>
-            <a:off x="4983480" y="5513831"/>
-            <a:ext cx="2148840" cy="365760"/>
-          </a:xfrm>
-          <a:prstGeom prst="rect">
-            <a:avLst/>
-          </a:prstGeom>
-          <a:noFill/>
-        </p:spPr>
-        <p:txBody>
-          <a:bodyPr wrap="square">
-            <a:spAutoFit/>
-          </a:bodyPr>
-          <a:lstStyle/>
-          <a:p>
-            <a:pPr algn="l"/>
-            <a:r>
-              <a:rPr sz="900" b="0">
-                <a:solidFill>
-                  <a:srgbClr val="FFFFFF"/>
-                </a:solidFill>
-              </a:rPr>
-              <a:t>✅ B2 Streamlit</a:t>
-            </a:r>
-          </a:p>
-        </p:txBody>
-      </p:sp>
-      <p:sp>
-        <p:nvSpPr>
-          <p:cNvPr id="27" name="TextBox 26"/>
-          <p:cNvSpPr txBox="1"/>
-          <p:nvPr/>
-        </p:nvSpPr>
-        <p:spPr>
-          <a:xfrm>
-            <a:off x="7223760" y="5513831"/>
-            <a:ext cx="2148840" cy="365760"/>
-          </a:xfrm>
-          <a:prstGeom prst="rect">
-            <a:avLst/>
-          </a:prstGeom>
-          <a:noFill/>
-        </p:spPr>
-        <p:txBody>
-          <a:bodyPr wrap="square">
-            <a:spAutoFit/>
-          </a:bodyPr>
-          <a:lstStyle/>
-          <a:p>
-            <a:pPr algn="l"/>
-            <a:r>
-              <a:rPr sz="900" b="0">
-                <a:solidFill>
-                  <a:srgbClr val="FFFFFF"/>
-                </a:solidFill>
-              </a:rPr>
-              <a:t>✅ B3 Monte Carlo</a:t>
-            </a:r>
-          </a:p>
-        </p:txBody>
-      </p:sp>
-      <p:sp>
-        <p:nvSpPr>
-          <p:cNvPr id="28" name="TextBox 27"/>
-          <p:cNvSpPr txBox="1"/>
-          <p:nvPr/>
-        </p:nvSpPr>
-        <p:spPr>
-          <a:xfrm>
-            <a:off x="9464040" y="5513831"/>
-            <a:ext cx="2148840" cy="365760"/>
-          </a:xfrm>
-          <a:prstGeom prst="rect">
-            <a:avLst/>
-          </a:prstGeom>
-          <a:noFill/>
-        </p:spPr>
-        <p:txBody>
-          <a:bodyPr wrap="square">
-            <a:spAutoFit/>
-          </a:bodyPr>
-          <a:lstStyle/>
-          <a:p>
-            <a:pPr algn="l"/>
-            <a:r>
-              <a:rPr sz="900" b="0">
-                <a:solidFill>
-                  <a:srgbClr val="FFFFFF"/>
-                </a:solidFill>
-              </a:rPr>
-              <a:t>✅ B4 Eff. Frontier</a:t>
-            </a:r>
-          </a:p>
-        </p:txBody>
-      </p:sp>
-      <p:sp>
-        <p:nvSpPr>
-          <p:cNvPr id="29" name="TextBox 28"/>
-          <p:cNvSpPr txBox="1"/>
-          <p:nvPr/>
-        </p:nvSpPr>
-        <p:spPr>
-          <a:xfrm>
-            <a:off x="0" y="6510528"/>
-            <a:ext cx="12188952" cy="274320"/>
-          </a:xfrm>
-          <a:prstGeom prst="rect">
-            <a:avLst/>
-          </a:prstGeom>
-          <a:noFill/>
-        </p:spPr>
-        <p:txBody>
-          <a:bodyPr wrap="square">
-            <a:spAutoFit/>
-          </a:bodyPr>
-          <a:lstStyle/>
-          <a:p>
-            <a:pPr algn="ctr"/>
-            <a:r>
-              <a:rPr sz="850" b="0">
-                <a:solidFill>
-                  <a:srgbClr val="94A3B8"/>
-                </a:solidFill>
-              </a:rPr>
-              <a:t>Prepared by: Intern / Data Analyst — Bluestock Fintech Pvt. Ltd.   |   For educational purposes only. Not financial advice.</a:t>
+              <a:t> Fintech Pvt. Ltd.  </a:t>
             </a:r>
           </a:p>
         </p:txBody>
@@ -6713,7 +5519,7 @@
 </file>
 
 <file path=ppt/slides/slide2.xml><?xml version="1.0" encoding="utf-8"?>
-<p:sld xmlns:a="http://schemas.openxmlformats.org/drawingml/2006/main" xmlns:p="http://schemas.openxmlformats.org/presentationml/2006/main" xmlns:r="http://schemas.openxmlformats.org/officeDocument/2006/relationships">
+<p:sld xmlns:a="http://schemas.openxmlformats.org/drawingml/2006/main" xmlns:r="http://schemas.openxmlformats.org/officeDocument/2006/relationships" xmlns:p="http://schemas.openxmlformats.org/presentationml/2006/main">
   <p:cSld>
     <p:spTree>
       <p:nvGrpSpPr>
@@ -6721,7 +5527,14 @@
         <p:cNvGrpSpPr/>
         <p:nvPr/>
       </p:nvGrpSpPr>
-      <p:grpSpPr/>
+      <p:grpSpPr>
+        <a:xfrm>
+          <a:off x="0" y="0"/>
+          <a:ext cx="0" cy="0"/>
+          <a:chOff x="0" y="0"/>
+          <a:chExt cx="0" cy="0"/>
+        </a:xfrm>
+      </p:grpSpPr>
       <p:sp>
         <p:nvSpPr>
           <p:cNvPr id="2" name="Rectangle 1"/>
@@ -6762,6 +5575,7 @@
           <a:lstStyle/>
           <a:p>
             <a:pPr algn="ctr"/>
+            <a:endParaRPr/>
           </a:p>
         </p:txBody>
       </p:sp>
@@ -6805,6 +5619,7 @@
           <a:lstStyle/>
           <a:p>
             <a:pPr algn="ctr"/>
+            <a:endParaRPr/>
           </a:p>
         </p:txBody>
       </p:sp>
@@ -6916,6 +5731,7 @@
           <a:lstStyle/>
           <a:p>
             <a:pPr algn="ctr"/>
+            <a:endParaRPr/>
           </a:p>
         </p:txBody>
       </p:sp>
@@ -7061,6 +5877,7 @@
           <a:lstStyle/>
           <a:p>
             <a:pPr algn="ctr"/>
+            <a:endParaRPr/>
           </a:p>
         </p:txBody>
       </p:sp>
@@ -7088,7 +5905,7 @@
           <a:p>
             <a:pPr algn="ctr"/>
             <a:r>
-              <a:rPr sz="1100" b="1">
+              <a:rPr sz="1100" b="1" dirty="0">
                 <a:solidFill>
                   <a:srgbClr val="FFFFFF"/>
                 </a:solidFill>
@@ -7206,6 +6023,7 @@
           <a:lstStyle/>
           <a:p>
             <a:pPr algn="ctr"/>
+            <a:endParaRPr/>
           </a:p>
         </p:txBody>
       </p:sp>
@@ -7267,7 +6085,7 @@
           <a:p>
             <a:pPr algn="l"/>
             <a:r>
-              <a:rPr sz="1050" b="1">
+              <a:rPr sz="1050" b="1" dirty="0">
                 <a:solidFill>
                   <a:srgbClr val="0D2137"/>
                 </a:solidFill>
@@ -7351,6 +6169,7 @@
           <a:lstStyle/>
           <a:p>
             <a:pPr algn="ctr"/>
+            <a:endParaRPr/>
           </a:p>
         </p:txBody>
       </p:sp>
@@ -7496,6 +6315,7 @@
           <a:lstStyle/>
           <a:p>
             <a:pPr algn="ctr"/>
+            <a:endParaRPr/>
           </a:p>
         </p:txBody>
       </p:sp>
@@ -7643,6 +6463,7 @@
           <a:lstStyle/>
           <a:p>
             <a:pPr algn="ctr"/>
+            <a:endParaRPr/>
           </a:p>
         </p:txBody>
       </p:sp>
@@ -7992,6 +6813,7 @@
           <a:lstStyle/>
           <a:p>
             <a:pPr algn="ctr"/>
+            <a:endParaRPr/>
           </a:p>
         </p:txBody>
       </p:sp>
@@ -8072,7 +6894,7 @@
 </file>
 
 <file path=ppt/slides/slide3.xml><?xml version="1.0" encoding="utf-8"?>
-<p:sld xmlns:a="http://schemas.openxmlformats.org/drawingml/2006/main" xmlns:p="http://schemas.openxmlformats.org/presentationml/2006/main" xmlns:r="http://schemas.openxmlformats.org/officeDocument/2006/relationships">
+<p:sld xmlns:a="http://schemas.openxmlformats.org/drawingml/2006/main" xmlns:r="http://schemas.openxmlformats.org/officeDocument/2006/relationships" xmlns:p="http://schemas.openxmlformats.org/presentationml/2006/main">
   <p:cSld>
     <p:spTree>
       <p:nvGrpSpPr>
@@ -8080,7 +6902,14 @@
         <p:cNvGrpSpPr/>
         <p:nvPr/>
       </p:nvGrpSpPr>
-      <p:grpSpPr/>
+      <p:grpSpPr>
+        <a:xfrm>
+          <a:off x="0" y="0"/>
+          <a:ext cx="0" cy="0"/>
+          <a:chOff x="0" y="0"/>
+          <a:chExt cx="0" cy="0"/>
+        </a:xfrm>
+      </p:grpSpPr>
       <p:sp>
         <p:nvSpPr>
           <p:cNvPr id="2" name="Rectangle 1"/>
@@ -8121,6 +6950,7 @@
           <a:lstStyle/>
           <a:p>
             <a:pPr algn="ctr"/>
+            <a:endParaRPr/>
           </a:p>
         </p:txBody>
       </p:sp>
@@ -8164,6 +6994,7 @@
           <a:lstStyle/>
           <a:p>
             <a:pPr algn="ctr"/>
+            <a:endParaRPr/>
           </a:p>
         </p:txBody>
       </p:sp>
@@ -8277,6 +7108,7 @@
           <a:lstStyle/>
           <a:p>
             <a:pPr algn="ctr"/>
+            <a:endParaRPr/>
           </a:p>
         </p:txBody>
       </p:sp>
@@ -8320,6 +7152,7 @@
           <a:lstStyle/>
           <a:p>
             <a:pPr algn="ctr"/>
+            <a:endParaRPr/>
           </a:p>
         </p:txBody>
       </p:sp>
@@ -8467,6 +7300,7 @@
           <a:lstStyle/>
           <a:p>
             <a:pPr algn="ctr"/>
+            <a:endParaRPr/>
           </a:p>
         </p:txBody>
       </p:sp>
@@ -8510,6 +7344,7 @@
           <a:lstStyle/>
           <a:p>
             <a:pPr algn="ctr"/>
+            <a:endParaRPr/>
           </a:p>
         </p:txBody>
       </p:sp>
@@ -8657,6 +7492,7 @@
           <a:lstStyle/>
           <a:p>
             <a:pPr algn="ctr"/>
+            <a:endParaRPr/>
           </a:p>
         </p:txBody>
       </p:sp>
@@ -8700,6 +7536,7 @@
           <a:lstStyle/>
           <a:p>
             <a:pPr algn="ctr"/>
+            <a:endParaRPr/>
           </a:p>
         </p:txBody>
       </p:sp>
@@ -8847,6 +7684,7 @@
           <a:lstStyle/>
           <a:p>
             <a:pPr algn="ctr"/>
+            <a:endParaRPr/>
           </a:p>
         </p:txBody>
       </p:sp>
@@ -8890,6 +7728,7 @@
           <a:lstStyle/>
           <a:p>
             <a:pPr algn="ctr"/>
+            <a:endParaRPr/>
           </a:p>
         </p:txBody>
       </p:sp>
@@ -9037,6 +7876,7 @@
           <a:lstStyle/>
           <a:p>
             <a:pPr algn="ctr"/>
+            <a:endParaRPr/>
           </a:p>
         </p:txBody>
       </p:sp>
@@ -9080,6 +7920,7 @@
           <a:lstStyle/>
           <a:p>
             <a:pPr algn="ctr"/>
+            <a:endParaRPr/>
           </a:p>
         </p:txBody>
       </p:sp>
@@ -9227,6 +8068,7 @@
           <a:lstStyle/>
           <a:p>
             <a:pPr algn="ctr"/>
+            <a:endParaRPr/>
           </a:p>
         </p:txBody>
       </p:sp>
@@ -9270,6 +8112,7 @@
           <a:lstStyle/>
           <a:p>
             <a:pPr algn="ctr"/>
+            <a:endParaRPr/>
           </a:p>
         </p:txBody>
       </p:sp>
@@ -9417,6 +8260,7 @@
           <a:lstStyle/>
           <a:p>
             <a:pPr algn="ctr"/>
+            <a:endParaRPr/>
           </a:p>
         </p:txBody>
       </p:sp>
@@ -9460,6 +8304,7 @@
           <a:lstStyle/>
           <a:p>
             <a:pPr algn="ctr"/>
+            <a:endParaRPr/>
           </a:p>
         </p:txBody>
       </p:sp>
@@ -9607,6 +8452,7 @@
           <a:lstStyle/>
           <a:p>
             <a:pPr algn="ctr"/>
+            <a:endParaRPr/>
           </a:p>
         </p:txBody>
       </p:sp>
@@ -9650,6 +8496,7 @@
           <a:lstStyle/>
           <a:p>
             <a:pPr algn="ctr"/>
+            <a:endParaRPr/>
           </a:p>
         </p:txBody>
       </p:sp>
@@ -9797,6 +8644,7 @@
           <a:lstStyle/>
           <a:p>
             <a:pPr algn="ctr"/>
+            <a:endParaRPr/>
           </a:p>
         </p:txBody>
       </p:sp>
@@ -9840,6 +8688,7 @@
           <a:lstStyle/>
           <a:p>
             <a:pPr algn="ctr"/>
+            <a:endParaRPr/>
           </a:p>
         </p:txBody>
       </p:sp>
@@ -9987,6 +8836,7 @@
           <a:lstStyle/>
           <a:p>
             <a:pPr algn="ctr"/>
+            <a:endParaRPr/>
           </a:p>
         </p:txBody>
       </p:sp>
@@ -10030,6 +8880,7 @@
           <a:lstStyle/>
           <a:p>
             <a:pPr algn="ctr"/>
+            <a:endParaRPr/>
           </a:p>
         </p:txBody>
       </p:sp>
@@ -10175,6 +9026,7 @@
           <a:lstStyle/>
           <a:p>
             <a:pPr algn="ctr"/>
+            <a:endParaRPr/>
           </a:p>
         </p:txBody>
       </p:sp>
@@ -10255,7 +9107,7 @@
 </file>
 
 <file path=ppt/slides/slide4.xml><?xml version="1.0" encoding="utf-8"?>
-<p:sld xmlns:a="http://schemas.openxmlformats.org/drawingml/2006/main" xmlns:p="http://schemas.openxmlformats.org/presentationml/2006/main" xmlns:r="http://schemas.openxmlformats.org/officeDocument/2006/relationships">
+<p:sld xmlns:a="http://schemas.openxmlformats.org/drawingml/2006/main" xmlns:r="http://schemas.openxmlformats.org/officeDocument/2006/relationships" xmlns:p="http://schemas.openxmlformats.org/presentationml/2006/main">
   <p:cSld>
     <p:spTree>
       <p:nvGrpSpPr>
@@ -10263,7 +9115,14 @@
         <p:cNvGrpSpPr/>
         <p:nvPr/>
       </p:nvGrpSpPr>
-      <p:grpSpPr/>
+      <p:grpSpPr>
+        <a:xfrm>
+          <a:off x="0" y="0"/>
+          <a:ext cx="0" cy="0"/>
+          <a:chOff x="0" y="0"/>
+          <a:chExt cx="0" cy="0"/>
+        </a:xfrm>
+      </p:grpSpPr>
       <p:sp>
         <p:nvSpPr>
           <p:cNvPr id="2" name="Rectangle 1"/>
@@ -10304,6 +9163,7 @@
           <a:lstStyle/>
           <a:p>
             <a:pPr algn="ctr"/>
+            <a:endParaRPr/>
           </a:p>
         </p:txBody>
       </p:sp>
@@ -10347,6 +9207,7 @@
           <a:lstStyle/>
           <a:p>
             <a:pPr algn="ctr"/>
+            <a:endParaRPr/>
           </a:p>
         </p:txBody>
       </p:sp>
@@ -10424,6 +9285,7 @@
           <a:lstStyle/>
           <a:p>
             <a:pPr algn="ctr"/>
+            <a:endParaRPr/>
           </a:p>
         </p:txBody>
       </p:sp>
@@ -10637,6 +9499,7 @@
           <a:lstStyle/>
           <a:p>
             <a:pPr algn="ctr"/>
+            <a:endParaRPr/>
           </a:p>
         </p:txBody>
       </p:sp>
@@ -10850,6 +9713,7 @@
           <a:lstStyle/>
           <a:p>
             <a:pPr algn="ctr"/>
+            <a:endParaRPr/>
           </a:p>
         </p:txBody>
       </p:sp>
@@ -11063,6 +9927,7 @@
           <a:lstStyle/>
           <a:p>
             <a:pPr algn="ctr"/>
+            <a:endParaRPr/>
           </a:p>
         </p:txBody>
       </p:sp>
@@ -11276,6 +10141,7 @@
           <a:lstStyle/>
           <a:p>
             <a:pPr algn="ctr"/>
+            <a:endParaRPr/>
           </a:p>
         </p:txBody>
       </p:sp>
@@ -11457,6 +10323,7 @@
           <a:lstStyle/>
           <a:p>
             <a:pPr algn="ctr"/>
+            <a:endParaRPr/>
           </a:p>
         </p:txBody>
       </p:sp>
@@ -11536,6 +10403,7 @@
           <a:lstStyle/>
           <a:p>
             <a:pPr algn="ctr"/>
+            <a:endParaRPr/>
           </a:p>
         </p:txBody>
       </p:sp>
@@ -11649,6 +10517,7 @@
           <a:lstStyle/>
           <a:p>
             <a:pPr algn="ctr"/>
+            <a:endParaRPr/>
           </a:p>
         </p:txBody>
       </p:sp>
@@ -11762,6 +10631,7 @@
           <a:lstStyle/>
           <a:p>
             <a:pPr algn="ctr"/>
+            <a:endParaRPr/>
           </a:p>
         </p:txBody>
       </p:sp>
@@ -11875,6 +10745,7 @@
           <a:lstStyle/>
           <a:p>
             <a:pPr algn="ctr"/>
+            <a:endParaRPr/>
           </a:p>
         </p:txBody>
       </p:sp>
@@ -11988,6 +10859,7 @@
           <a:lstStyle/>
           <a:p>
             <a:pPr algn="ctr"/>
+            <a:endParaRPr/>
           </a:p>
         </p:txBody>
       </p:sp>
@@ -12101,6 +10973,7 @@
           <a:lstStyle/>
           <a:p>
             <a:pPr algn="ctr"/>
+            <a:endParaRPr/>
           </a:p>
         </p:txBody>
       </p:sp>
@@ -12214,6 +11087,7 @@
           <a:lstStyle/>
           <a:p>
             <a:pPr algn="ctr"/>
+            <a:endParaRPr/>
           </a:p>
         </p:txBody>
       </p:sp>
@@ -12327,6 +11201,7 @@
           <a:lstStyle/>
           <a:p>
             <a:pPr algn="ctr"/>
+            <a:endParaRPr/>
           </a:p>
         </p:txBody>
       </p:sp>
@@ -12440,6 +11315,7 @@
           <a:lstStyle/>
           <a:p>
             <a:pPr algn="ctr"/>
+            <a:endParaRPr/>
           </a:p>
         </p:txBody>
       </p:sp>
@@ -12553,6 +11429,7 @@
           <a:lstStyle/>
           <a:p>
             <a:pPr algn="ctr"/>
+            <a:endParaRPr/>
           </a:p>
         </p:txBody>
       </p:sp>
@@ -12666,6 +11543,7 @@
           <a:lstStyle/>
           <a:p>
             <a:pPr algn="ctr"/>
+            <a:endParaRPr/>
           </a:p>
         </p:txBody>
       </p:sp>
@@ -12777,6 +11655,7 @@
           <a:lstStyle/>
           <a:p>
             <a:pPr algn="ctr"/>
+            <a:endParaRPr/>
           </a:p>
         </p:txBody>
       </p:sp>
@@ -12857,7 +11736,7 @@
 </file>
 
 <file path=ppt/slides/slide5.xml><?xml version="1.0" encoding="utf-8"?>
-<p:sld xmlns:a="http://schemas.openxmlformats.org/drawingml/2006/main" xmlns:p="http://schemas.openxmlformats.org/presentationml/2006/main" xmlns:r="http://schemas.openxmlformats.org/officeDocument/2006/relationships">
+<p:sld xmlns:a="http://schemas.openxmlformats.org/drawingml/2006/main" xmlns:r="http://schemas.openxmlformats.org/officeDocument/2006/relationships" xmlns:p="http://schemas.openxmlformats.org/presentationml/2006/main">
   <p:cSld>
     <p:spTree>
       <p:nvGrpSpPr>
@@ -12865,7 +11744,14 @@
         <p:cNvGrpSpPr/>
         <p:nvPr/>
       </p:nvGrpSpPr>
-      <p:grpSpPr/>
+      <p:grpSpPr>
+        <a:xfrm>
+          <a:off x="0" y="0"/>
+          <a:ext cx="0" cy="0"/>
+          <a:chOff x="0" y="0"/>
+          <a:chExt cx="0" cy="0"/>
+        </a:xfrm>
+      </p:grpSpPr>
       <p:sp>
         <p:nvSpPr>
           <p:cNvPr id="2" name="Rectangle 1"/>
@@ -12906,6 +11792,7 @@
           <a:lstStyle/>
           <a:p>
             <a:pPr algn="ctr"/>
+            <a:endParaRPr/>
           </a:p>
         </p:txBody>
       </p:sp>
@@ -12949,6 +11836,7 @@
           <a:lstStyle/>
           <a:p>
             <a:pPr algn="ctr"/>
+            <a:endParaRPr/>
           </a:p>
         </p:txBody>
       </p:sp>
@@ -13110,6 +11998,7 @@
           <a:lstStyle/>
           <a:p>
             <a:pPr algn="ctr"/>
+            <a:endParaRPr/>
           </a:p>
         </p:txBody>
       </p:sp>
@@ -13257,6 +12146,7 @@
           <a:lstStyle/>
           <a:p>
             <a:pPr algn="ctr"/>
+            <a:endParaRPr/>
           </a:p>
         </p:txBody>
       </p:sp>
@@ -13402,6 +12292,7 @@
           <a:lstStyle/>
           <a:p>
             <a:pPr algn="ctr"/>
+            <a:endParaRPr/>
           </a:p>
         </p:txBody>
       </p:sp>
@@ -13482,7 +12373,7 @@
 </file>
 
 <file path=ppt/slides/slide6.xml><?xml version="1.0" encoding="utf-8"?>
-<p:sld xmlns:a="http://schemas.openxmlformats.org/drawingml/2006/main" xmlns:p="http://schemas.openxmlformats.org/presentationml/2006/main" xmlns:r="http://schemas.openxmlformats.org/officeDocument/2006/relationships">
+<p:sld xmlns:a="http://schemas.openxmlformats.org/drawingml/2006/main" xmlns:r="http://schemas.openxmlformats.org/officeDocument/2006/relationships" xmlns:p="http://schemas.openxmlformats.org/presentationml/2006/main">
   <p:cSld>
     <p:spTree>
       <p:nvGrpSpPr>
@@ -13490,7 +12381,14 @@
         <p:cNvGrpSpPr/>
         <p:nvPr/>
       </p:nvGrpSpPr>
-      <p:grpSpPr/>
+      <p:grpSpPr>
+        <a:xfrm>
+          <a:off x="0" y="0"/>
+          <a:ext cx="0" cy="0"/>
+          <a:chOff x="0" y="0"/>
+          <a:chExt cx="0" cy="0"/>
+        </a:xfrm>
+      </p:grpSpPr>
       <p:sp>
         <p:nvSpPr>
           <p:cNvPr id="2" name="Rectangle 1"/>
@@ -13531,6 +12429,7 @@
           <a:lstStyle/>
           <a:p>
             <a:pPr algn="ctr"/>
+            <a:endParaRPr/>
           </a:p>
         </p:txBody>
       </p:sp>
@@ -13574,6 +12473,7 @@
           <a:lstStyle/>
           <a:p>
             <a:pPr algn="ctr"/>
+            <a:endParaRPr/>
           </a:p>
         </p:txBody>
       </p:sp>
@@ -13815,6 +12715,7 @@
           <a:lstStyle/>
           <a:p>
             <a:pPr algn="ctr"/>
+            <a:endParaRPr/>
           </a:p>
         </p:txBody>
       </p:sp>
@@ -13895,7 +12796,7 @@
 </file>
 
 <file path=ppt/slides/slide7.xml><?xml version="1.0" encoding="utf-8"?>
-<p:sld xmlns:a="http://schemas.openxmlformats.org/drawingml/2006/main" xmlns:p="http://schemas.openxmlformats.org/presentationml/2006/main" xmlns:r="http://schemas.openxmlformats.org/officeDocument/2006/relationships">
+<p:sld xmlns:a="http://schemas.openxmlformats.org/drawingml/2006/main" xmlns:r="http://schemas.openxmlformats.org/officeDocument/2006/relationships" xmlns:p="http://schemas.openxmlformats.org/presentationml/2006/main">
   <p:cSld>
     <p:spTree>
       <p:nvGrpSpPr>
@@ -13903,7 +12804,14 @@
         <p:cNvGrpSpPr/>
         <p:nvPr/>
       </p:nvGrpSpPr>
-      <p:grpSpPr/>
+      <p:grpSpPr>
+        <a:xfrm>
+          <a:off x="0" y="0"/>
+          <a:ext cx="0" cy="0"/>
+          <a:chOff x="0" y="0"/>
+          <a:chExt cx="0" cy="0"/>
+        </a:xfrm>
+      </p:grpSpPr>
       <p:sp>
         <p:nvSpPr>
           <p:cNvPr id="2" name="Rectangle 1"/>
@@ -13944,6 +12852,7 @@
           <a:lstStyle/>
           <a:p>
             <a:pPr algn="ctr"/>
+            <a:endParaRPr/>
           </a:p>
         </p:txBody>
       </p:sp>
@@ -13987,6 +12896,7 @@
           <a:lstStyle/>
           <a:p>
             <a:pPr algn="ctr"/>
+            <a:endParaRPr/>
           </a:p>
         </p:txBody>
       </p:sp>
@@ -14100,6 +13010,7 @@
           <a:lstStyle/>
           <a:p>
             <a:pPr algn="ctr"/>
+            <a:endParaRPr/>
           </a:p>
         </p:txBody>
       </p:sp>
@@ -14723,6 +13634,7 @@
           <a:lstStyle/>
           <a:p>
             <a:pPr algn="ctr"/>
+            <a:endParaRPr/>
           </a:p>
         </p:txBody>
       </p:sp>
@@ -14936,6 +13848,7 @@
           <a:lstStyle/>
           <a:p>
             <a:pPr algn="ctr"/>
+            <a:endParaRPr/>
           </a:p>
         </p:txBody>
       </p:sp>
@@ -15115,6 +14028,7 @@
           <a:lstStyle/>
           <a:p>
             <a:pPr algn="ctr"/>
+            <a:endParaRPr/>
           </a:p>
         </p:txBody>
       </p:sp>
@@ -15294,6 +14208,7 @@
           <a:lstStyle/>
           <a:p>
             <a:pPr algn="ctr"/>
+            <a:endParaRPr/>
           </a:p>
         </p:txBody>
       </p:sp>
@@ -15473,6 +14388,7 @@
           <a:lstStyle/>
           <a:p>
             <a:pPr algn="ctr"/>
+            <a:endParaRPr/>
           </a:p>
         </p:txBody>
       </p:sp>
@@ -15652,6 +14568,7 @@
           <a:lstStyle/>
           <a:p>
             <a:pPr algn="ctr"/>
+            <a:endParaRPr/>
           </a:p>
         </p:txBody>
       </p:sp>
@@ -15831,6 +14748,7 @@
           <a:lstStyle/>
           <a:p>
             <a:pPr algn="ctr"/>
+            <a:endParaRPr/>
           </a:p>
         </p:txBody>
       </p:sp>
@@ -16010,6 +14928,7 @@
           <a:lstStyle/>
           <a:p>
             <a:pPr algn="ctr"/>
+            <a:endParaRPr/>
           </a:p>
         </p:txBody>
       </p:sp>
@@ -16189,6 +15108,7 @@
           <a:lstStyle/>
           <a:p>
             <a:pPr algn="ctr"/>
+            <a:endParaRPr/>
           </a:p>
         </p:txBody>
       </p:sp>
@@ -16416,6 +15336,7 @@
           <a:lstStyle/>
           <a:p>
             <a:pPr algn="ctr"/>
+            <a:endParaRPr/>
           </a:p>
         </p:txBody>
       </p:sp>
@@ -16496,7 +15417,7 @@
 </file>
 
 <file path=ppt/slides/slide8.xml><?xml version="1.0" encoding="utf-8"?>
-<p:sld xmlns:a="http://schemas.openxmlformats.org/drawingml/2006/main" xmlns:p="http://schemas.openxmlformats.org/presentationml/2006/main" xmlns:r="http://schemas.openxmlformats.org/officeDocument/2006/relationships">
+<p:sld xmlns:a="http://schemas.openxmlformats.org/drawingml/2006/main" xmlns:r="http://schemas.openxmlformats.org/officeDocument/2006/relationships" xmlns:p="http://schemas.openxmlformats.org/presentationml/2006/main">
   <p:cSld>
     <p:spTree>
       <p:nvGrpSpPr>
@@ -16504,7 +15425,14 @@
         <p:cNvGrpSpPr/>
         <p:nvPr/>
       </p:nvGrpSpPr>
-      <p:grpSpPr/>
+      <p:grpSpPr>
+        <a:xfrm>
+          <a:off x="0" y="0"/>
+          <a:ext cx="0" cy="0"/>
+          <a:chOff x="0" y="0"/>
+          <a:chExt cx="0" cy="0"/>
+        </a:xfrm>
+      </p:grpSpPr>
       <p:sp>
         <p:nvSpPr>
           <p:cNvPr id="2" name="Rectangle 1"/>
@@ -16545,6 +15473,7 @@
           <a:lstStyle/>
           <a:p>
             <a:pPr algn="ctr"/>
+            <a:endParaRPr/>
           </a:p>
         </p:txBody>
       </p:sp>
@@ -16588,6 +15517,7 @@
           <a:lstStyle/>
           <a:p>
             <a:pPr algn="ctr"/>
+            <a:endParaRPr/>
           </a:p>
         </p:txBody>
       </p:sp>
@@ -16749,6 +15679,7 @@
           <a:lstStyle/>
           <a:p>
             <a:pPr algn="ctr"/>
+            <a:endParaRPr/>
           </a:p>
         </p:txBody>
       </p:sp>
@@ -16930,6 +15861,7 @@
           <a:lstStyle/>
           <a:p>
             <a:pPr algn="ctr"/>
+            <a:endParaRPr/>
           </a:p>
         </p:txBody>
       </p:sp>
@@ -17109,6 +16041,7 @@
           <a:lstStyle/>
           <a:p>
             <a:pPr algn="ctr"/>
+            <a:endParaRPr/>
           </a:p>
         </p:txBody>
       </p:sp>
@@ -17189,7 +16122,7 @@
 </file>
 
 <file path=ppt/slides/slide9.xml><?xml version="1.0" encoding="utf-8"?>
-<p:sld xmlns:a="http://schemas.openxmlformats.org/drawingml/2006/main" xmlns:p="http://schemas.openxmlformats.org/presentationml/2006/main" xmlns:r="http://schemas.openxmlformats.org/officeDocument/2006/relationships">
+<p:sld xmlns:a="http://schemas.openxmlformats.org/drawingml/2006/main" xmlns:r="http://schemas.openxmlformats.org/officeDocument/2006/relationships" xmlns:p="http://schemas.openxmlformats.org/presentationml/2006/main">
   <p:cSld>
     <p:spTree>
       <p:nvGrpSpPr>
@@ -17197,7 +16130,14 @@
         <p:cNvGrpSpPr/>
         <p:nvPr/>
       </p:nvGrpSpPr>
-      <p:grpSpPr/>
+      <p:grpSpPr>
+        <a:xfrm>
+          <a:off x="0" y="0"/>
+          <a:ext cx="0" cy="0"/>
+          <a:chOff x="0" y="0"/>
+          <a:chExt cx="0" cy="0"/>
+        </a:xfrm>
+      </p:grpSpPr>
       <p:sp>
         <p:nvSpPr>
           <p:cNvPr id="2" name="Rectangle 1"/>
@@ -17238,6 +16178,7 @@
           <a:lstStyle/>
           <a:p>
             <a:pPr algn="ctr"/>
+            <a:endParaRPr/>
           </a:p>
         </p:txBody>
       </p:sp>
@@ -17281,6 +16222,7 @@
           <a:lstStyle/>
           <a:p>
             <a:pPr algn="ctr"/>
+            <a:endParaRPr/>
           </a:p>
         </p:txBody>
       </p:sp>
@@ -17394,6 +16336,7 @@
           <a:lstStyle/>
           <a:p>
             <a:pPr algn="ctr"/>
+            <a:endParaRPr/>
           </a:p>
         </p:txBody>
       </p:sp>
@@ -17437,6 +16380,7 @@
           <a:lstStyle/>
           <a:p>
             <a:pPr algn="ctr"/>
+            <a:endParaRPr/>
           </a:p>
         </p:txBody>
       </p:sp>
@@ -17618,6 +16562,7 @@
           <a:lstStyle/>
           <a:p>
             <a:pPr algn="ctr"/>
+            <a:endParaRPr/>
           </a:p>
         </p:txBody>
       </p:sp>
@@ -17661,6 +16606,7 @@
           <a:lstStyle/>
           <a:p>
             <a:pPr algn="ctr"/>
+            <a:endParaRPr/>
           </a:p>
         </p:txBody>
       </p:sp>
@@ -17842,6 +16788,7 @@
           <a:lstStyle/>
           <a:p>
             <a:pPr algn="ctr"/>
+            <a:endParaRPr/>
           </a:p>
         </p:txBody>
       </p:sp>
@@ -17885,6 +16832,7 @@
           <a:lstStyle/>
           <a:p>
             <a:pPr algn="ctr"/>
+            <a:endParaRPr/>
           </a:p>
         </p:txBody>
       </p:sp>
@@ -18066,6 +17014,7 @@
           <a:lstStyle/>
           <a:p>
             <a:pPr algn="ctr"/>
+            <a:endParaRPr/>
           </a:p>
         </p:txBody>
       </p:sp>
@@ -18109,6 +17058,7 @@
           <a:lstStyle/>
           <a:p>
             <a:pPr algn="ctr"/>
+            <a:endParaRPr/>
           </a:p>
         </p:txBody>
       </p:sp>
@@ -18288,6 +17238,7 @@
           <a:lstStyle/>
           <a:p>
             <a:pPr algn="ctr"/>
+            <a:endParaRPr/>
           </a:p>
         </p:txBody>
       </p:sp>
@@ -18365,6 +17316,7 @@
           <a:lstStyle/>
           <a:p>
             <a:pPr algn="ctr"/>
+            <a:endParaRPr/>
           </a:p>
         </p:txBody>
       </p:sp>
